--- a/esp32_mqtt_slides.pptx
+++ b/esp32_mqtt_slides.pptx
@@ -3116,9 +3116,7 @@
             <a:srgbClr val="0F172A"/>
           </a:solidFill>
           <a:ln>
-            <a:solidFill>
-              <a:srgbClr val="0F172A"/>
-            </a:solidFill>
+            <a:noFill/>
           </a:ln>
         </p:spPr>
         <p:style>
@@ -3145,14 +3143,57 @@
       </p:sp>
       <p:sp>
         <p:nvSpPr>
-          <p:cNvPr id="3" name="TextBox 2"/>
+          <p:cNvPr id="3" name="Oval 2"/>
+          <p:cNvSpPr/>
+          <p:nvPr/>
+        </p:nvSpPr>
+        <p:spPr>
+          <a:xfrm>
+            <a:off x="8778240" y="-1097280"/>
+            <a:ext cx="4572000" cy="4572000"/>
+          </a:xfrm>
+          <a:prstGeom prst="ellipse">
+            <a:avLst/>
+          </a:prstGeom>
+          <a:solidFill>
+            <a:srgbClr val="162A4A"/>
+          </a:solidFill>
+          <a:ln>
+            <a:noFill/>
+          </a:ln>
+        </p:spPr>
+        <p:style>
+          <a:lnRef idx="1">
+            <a:schemeClr val="accent1"/>
+          </a:lnRef>
+          <a:fillRef idx="3">
+            <a:schemeClr val="accent1"/>
+          </a:fillRef>
+          <a:effectRef idx="2">
+            <a:schemeClr val="accent1"/>
+          </a:effectRef>
+          <a:fontRef idx="minor">
+            <a:schemeClr val="lt1"/>
+          </a:fontRef>
+        </p:style>
+        <p:txBody>
+          <a:bodyPr rtlCol="0" anchor="ctr"/>
+          <a:lstStyle/>
+          <a:p>
+            <a:pPr algn="ctr"/>
+          </a:p>
+        </p:txBody>
+      </p:sp>
+      <p:sp>
+        <p:nvSpPr>
+          <p:cNvPr id="4" name="TextBox 3"/>
           <p:cNvSpPr txBox="1"/>
           <p:nvPr/>
         </p:nvSpPr>
         <p:spPr>
           <a:xfrm>
-            <a:off x="1097280" y="1645920"/>
-            <a:ext cx="10058400" cy="3474720"/>
+            <a:off x="1097280" y="1554480"/>
+            <a:ext cx="10058400" cy="3840480"/>
           </a:xfrm>
           <a:prstGeom prst="rect">
             <a:avLst/>
@@ -3167,9 +3208,25 @@
           <a:p>
             <a:pPr>
               <a:spcAft>
+                <a:spcPts val="1200"/>
+              </a:spcAft>
+              <a:defRPr sz="1700" b="1">
+                <a:solidFill>
+                  <a:srgbClr val="D97706"/>
+                </a:solidFill>
+                <a:latin typeface="微軟正黑體"/>
+              </a:defRPr>
+            </a:pPr>
+            <a:r>
+              <a:t>📡 智慧物聯網與邊緣 AI 實習系列</a:t>
+            </a:r>
+          </a:p>
+          <a:p>
+            <a:pPr>
+              <a:spcAft>
                 <a:spcPts val="1400"/>
               </a:spcAft>
-              <a:defRPr sz="3800" b="1">
+              <a:defRPr sz="4000" b="1">
                 <a:solidFill>
                   <a:srgbClr val="FFFFFF"/>
                 </a:solidFill>
@@ -3193,12 +3250,12 @@
               </a:defRPr>
             </a:pPr>
             <a:r>
-              <a:t>感測器探索 ‧ 四按鈕碼表 ‧ MQTT 雲端遙控 ‧ AI 視覺辨識連動</a:t>
-            </a:r>
-          </a:p>
-          <a:p>
-            <a:pPr>
-              <a:defRPr sz="1400">
+              <a:t>BME280 感測器探索 ‧ 四按鈕 OLED 碼表 ‧ MQTT 雲端遙控 ‧ AI 視覺辨識連動</a:t>
+            </a:r>
+          </a:p>
+          <a:p>
+            <a:pPr>
+              <a:defRPr sz="1450">
                 <a:solidFill>
                   <a:srgbClr val="C8D7EB"/>
                 </a:solidFill>
@@ -3206,11 +3263,11 @@
               </a:defRPr>
             </a:pPr>
             <a:r>
-              <a:t>課程解析整理與教師教學講義 / 投影片模組</a:t>
+              <a:t>主講：簡樹桐 老師 ｜ 適用：高中職專題製作 ‧ 物聯網實習 ‧ AI 應用實作</a:t>
             </a:r>
             <a:br/>
             <a:r>
-              <a:t>主講課程精華：簡樹桐 老師 ｜ 適用：高中職專題製作 ‧ 物聯網實習 ‧ AI 應用實作</a:t>
+              <a:t>🌐 線上互動教材：https://stjedu.github.io/www/esp32_mqtt_course.html</a:t>
             </a:r>
           </a:p>
         </p:txBody>
@@ -3220,6 +3277,9 @@
   <p:clrMapOvr>
     <a:masterClrMapping/>
   </p:clrMapOvr>
+  <p:transition spd="med">
+    <p:fade/>
+  </p:transition>
 </p:sld>
 </file>
 
@@ -3242,18 +3302,16 @@
         <p:spPr>
           <a:xfrm>
             <a:off x="0" y="0"/>
-            <a:ext cx="12191695" cy="1005840"/>
+            <a:ext cx="12191695" cy="6858000"/>
           </a:xfrm>
           <a:prstGeom prst="rect">
             <a:avLst/>
           </a:prstGeom>
           <a:solidFill>
-            <a:srgbClr val="0F172A"/>
+            <a:srgbClr val="F8FAFC"/>
           </a:solidFill>
           <a:ln>
-            <a:solidFill>
-              <a:srgbClr val="0F172A"/>
-            </a:solidFill>
+            <a:noFill/>
           </a:ln>
         </p:spPr>
         <p:style>
@@ -3280,14 +3338,100 @@
       </p:sp>
       <p:sp>
         <p:nvSpPr>
-          <p:cNvPr id="3" name="TextBox 2"/>
+          <p:cNvPr id="3" name="Rectangle 2"/>
+          <p:cNvSpPr/>
+          <p:nvPr/>
+        </p:nvSpPr>
+        <p:spPr>
+          <a:xfrm>
+            <a:off x="0" y="0"/>
+            <a:ext cx="12191695" cy="1051560"/>
+          </a:xfrm>
+          <a:prstGeom prst="rect">
+            <a:avLst/>
+          </a:prstGeom>
+          <a:solidFill>
+            <a:srgbClr val="0F172A"/>
+          </a:solidFill>
+          <a:ln>
+            <a:noFill/>
+          </a:ln>
+        </p:spPr>
+        <p:style>
+          <a:lnRef idx="1">
+            <a:schemeClr val="accent1"/>
+          </a:lnRef>
+          <a:fillRef idx="3">
+            <a:schemeClr val="accent1"/>
+          </a:fillRef>
+          <a:effectRef idx="2">
+            <a:schemeClr val="accent1"/>
+          </a:effectRef>
+          <a:fontRef idx="minor">
+            <a:schemeClr val="lt1"/>
+          </a:fontRef>
+        </p:style>
+        <p:txBody>
+          <a:bodyPr rtlCol="0" anchor="ctr"/>
+          <a:lstStyle/>
+          <a:p>
+            <a:pPr algn="ctr"/>
+          </a:p>
+        </p:txBody>
+      </p:sp>
+      <p:sp>
+        <p:nvSpPr>
+          <p:cNvPr id="4" name="Rectangle 3"/>
+          <p:cNvSpPr/>
+          <p:nvPr/>
+        </p:nvSpPr>
+        <p:spPr>
+          <a:xfrm>
+            <a:off x="0" y="1051560"/>
+            <a:ext cx="4114800" cy="45720"/>
+          </a:xfrm>
+          <a:prstGeom prst="rect">
+            <a:avLst/>
+          </a:prstGeom>
+          <a:solidFill>
+            <a:srgbClr val="0284C7"/>
+          </a:solidFill>
+          <a:ln>
+            <a:noFill/>
+          </a:ln>
+        </p:spPr>
+        <p:style>
+          <a:lnRef idx="1">
+            <a:schemeClr val="accent1"/>
+          </a:lnRef>
+          <a:fillRef idx="3">
+            <a:schemeClr val="accent1"/>
+          </a:fillRef>
+          <a:effectRef idx="2">
+            <a:schemeClr val="accent1"/>
+          </a:effectRef>
+          <a:fontRef idx="minor">
+            <a:schemeClr val="lt1"/>
+          </a:fontRef>
+        </p:style>
+        <p:txBody>
+          <a:bodyPr rtlCol="0" anchor="ctr"/>
+          <a:lstStyle/>
+          <a:p>
+            <a:pPr algn="ctr"/>
+          </a:p>
+        </p:txBody>
+      </p:sp>
+      <p:sp>
+        <p:nvSpPr>
+          <p:cNvPr id="5" name="TextBox 4"/>
           <p:cNvSpPr txBox="1"/>
           <p:nvPr/>
         </p:nvSpPr>
         <p:spPr>
           <a:xfrm>
             <a:off x="731520" y="109728"/>
-            <a:ext cx="10698480" cy="274320"/>
+            <a:ext cx="7772400" cy="274320"/>
           </a:xfrm>
           <a:prstGeom prst="rect">
             <a:avLst/>
@@ -3301,7 +3445,7 @@
           <a:lstStyle/>
           <a:p>
             <a:pPr>
-              <a:defRPr sz="1100" b="1">
+              <a:defRPr sz="1150" b="1">
                 <a:solidFill>
                   <a:srgbClr val="0284C7"/>
                 </a:solidFill>
@@ -3309,20 +3453,56 @@
               </a:defRPr>
             </a:pPr>
             <a:r>
-              <a:t>ESP32 ✕ 物聯網 MQTT ✕ 邊緣 AI 實戰</a:t>
-            </a:r>
-          </a:p>
-        </p:txBody>
-      </p:sp>
-      <p:sp>
-        <p:nvSpPr>
-          <p:cNvPr id="4" name="TextBox 3"/>
+              <a:t>📡 ESP32 ✕ 物聯網 MQTT ✕ 邊緣 AI 實戰</a:t>
+            </a:r>
+          </a:p>
+        </p:txBody>
+      </p:sp>
+      <p:sp>
+        <p:nvSpPr>
+          <p:cNvPr id="6" name="TextBox 5"/>
           <p:cNvSpPr txBox="1"/>
           <p:nvPr/>
         </p:nvSpPr>
         <p:spPr>
           <a:xfrm>
-            <a:off x="731520" y="320040"/>
+            <a:off x="9144000" y="109728"/>
+            <a:ext cx="2286000" cy="274320"/>
+          </a:xfrm>
+          <a:prstGeom prst="rect">
+            <a:avLst/>
+          </a:prstGeom>
+          <a:noFill/>
+        </p:spPr>
+        <p:txBody>
+          <a:bodyPr wrap="none">
+            <a:spAutoFit/>
+          </a:bodyPr>
+          <a:lstStyle/>
+          <a:p>
+            <a:pPr algn="r">
+              <a:defRPr sz="1200" b="1">
+                <a:solidFill>
+                  <a:srgbClr val="B4C8E1"/>
+                </a:solidFill>
+                <a:latin typeface="微軟正黑體"/>
+              </a:defRPr>
+            </a:pPr>
+            <a:r>
+              <a:t>第 10 / 11 頁</a:t>
+            </a:r>
+          </a:p>
+        </p:txBody>
+      </p:sp>
+      <p:sp>
+        <p:nvSpPr>
+          <p:cNvPr id="7" name="TextBox 6"/>
+          <p:cNvSpPr txBox="1"/>
+          <p:nvPr/>
+        </p:nvSpPr>
+        <p:spPr>
+          <a:xfrm>
+            <a:off x="731520" y="365760"/>
             <a:ext cx="10698480" cy="594360"/>
           </a:xfrm>
           <a:prstGeom prst="rect">
@@ -3337,7 +3517,7 @@
           <a:lstStyle/>
           <a:p>
             <a:pPr>
-              <a:defRPr sz="2200" b="1">
+              <a:defRPr sz="2400" b="1">
                 <a:solidFill>
                   <a:srgbClr val="FFFFFF"/>
                 </a:solidFill>
@@ -3352,14 +3532,50 @@
       </p:sp>
       <p:sp>
         <p:nvSpPr>
-          <p:cNvPr id="5" name="Rounded Rectangle 4"/>
+          <p:cNvPr id="8" name="TextBox 7"/>
+          <p:cNvSpPr txBox="1"/>
+          <p:nvPr/>
+        </p:nvSpPr>
+        <p:spPr>
+          <a:xfrm>
+            <a:off x="731520" y="6510528"/>
+            <a:ext cx="10698480" cy="274320"/>
+          </a:xfrm>
+          <a:prstGeom prst="rect">
+            <a:avLst/>
+          </a:prstGeom>
+          <a:noFill/>
+        </p:spPr>
+        <p:txBody>
+          <a:bodyPr wrap="none">
+            <a:spAutoFit/>
+          </a:bodyPr>
+          <a:lstStyle/>
+          <a:p>
+            <a:pPr>
+              <a:defRPr sz="1050">
+                <a:solidFill>
+                  <a:srgbClr val="64748B"/>
+                </a:solidFill>
+                <a:latin typeface="微軟正黑體"/>
+              </a:defRPr>
+            </a:pPr>
+            <a:r>
+              <a:t>🌐 互動課程網頁：https://stjedu.github.io/www/esp32_mqtt_course.html   |   主講：簡樹桐 老師</a:t>
+            </a:r>
+          </a:p>
+        </p:txBody>
+      </p:sp>
+      <p:sp>
+        <p:nvSpPr>
+          <p:cNvPr id="9" name="Rounded Rectangle 8"/>
           <p:cNvSpPr/>
           <p:nvPr/>
         </p:nvSpPr>
         <p:spPr>
           <a:xfrm>
-            <a:off x="731520" y="1371600"/>
-            <a:ext cx="10698480" cy="4937760"/>
+            <a:off x="731520" y="1325880"/>
+            <a:ext cx="10698480" cy="4983480"/>
           </a:xfrm>
           <a:prstGeom prst="roundRect">
             <a:avLst/>
@@ -3397,14 +3613,57 @@
       </p:sp>
       <p:sp>
         <p:nvSpPr>
-          <p:cNvPr id="6" name="TextBox 5"/>
+          <p:cNvPr id="10" name="Rounded Rectangle 9"/>
+          <p:cNvSpPr/>
+          <p:nvPr/>
+        </p:nvSpPr>
+        <p:spPr>
+          <a:xfrm>
+            <a:off x="731520" y="1325880"/>
+            <a:ext cx="10698480" cy="91440"/>
+          </a:xfrm>
+          <a:prstGeom prst="roundRect">
+            <a:avLst/>
+          </a:prstGeom>
+          <a:solidFill>
+            <a:srgbClr val="0284C7"/>
+          </a:solidFill>
+          <a:ln>
+            <a:noFill/>
+          </a:ln>
+        </p:spPr>
+        <p:style>
+          <a:lnRef idx="1">
+            <a:schemeClr val="accent1"/>
+          </a:lnRef>
+          <a:fillRef idx="3">
+            <a:schemeClr val="accent1"/>
+          </a:fillRef>
+          <a:effectRef idx="2">
+            <a:schemeClr val="accent1"/>
+          </a:effectRef>
+          <a:fontRef idx="minor">
+            <a:schemeClr val="lt1"/>
+          </a:fontRef>
+        </p:style>
+        <p:txBody>
+          <a:bodyPr rtlCol="0" anchor="ctr"/>
+          <a:lstStyle/>
+          <a:p>
+            <a:pPr algn="ctr"/>
+          </a:p>
+        </p:txBody>
+      </p:sp>
+      <p:sp>
+        <p:nvSpPr>
+          <p:cNvPr id="11" name="TextBox 10"/>
           <p:cNvSpPr txBox="1"/>
           <p:nvPr/>
         </p:nvSpPr>
         <p:spPr>
           <a:xfrm>
-            <a:off x="914400" y="1508760"/>
-            <a:ext cx="10332720" cy="4663440"/>
+            <a:off x="960120" y="1508760"/>
+            <a:ext cx="10241280" cy="4663440"/>
           </a:xfrm>
           <a:prstGeom prst="rect">
             <a:avLst/>
@@ -3421,7 +3680,7 @@
               <a:spcAft>
                 <a:spcPts val="1000"/>
               </a:spcAft>
-              <a:defRPr sz="1600" b="1">
+              <a:defRPr sz="1750" b="1">
                 <a:solidFill>
                   <a:srgbClr val="0F172A"/>
                 </a:solidFill>
@@ -3434,12 +3693,15 @@
           </a:p>
           <a:p>
             <a:pPr>
+              <a:lnSpc>
+                <a:spcPct val="125000"/>
+              </a:lnSpc>
               <a:spcAft>
-                <a:spcPts val="600"/>
+                <a:spcPts val="700"/>
               </a:spcAft>
             </a:pPr>
             <a:r>
-              <a:rPr b="1" sz="1300">
+              <a:rPr b="1" sz="1350">
                 <a:solidFill>
                   <a:srgbClr val="0F172A"/>
                 </a:solidFill>
@@ -3448,7 +3710,7 @@
               <a:t>階段一【感測器與 OLED】： </a:t>
             </a:r>
             <a:r>
-              <a:rPr b="0" sz="1300">
+              <a:rPr b="0" sz="1350">
                 <a:solidFill>
                   <a:srgbClr val="64748B"/>
                 </a:solidFill>
@@ -3459,12 +3721,15 @@
           </a:p>
           <a:p>
             <a:pPr>
+              <a:lnSpc>
+                <a:spcPct val="125000"/>
+              </a:lnSpc>
               <a:spcAft>
-                <a:spcPts val="600"/>
+                <a:spcPts val="700"/>
               </a:spcAft>
             </a:pPr>
             <a:r>
-              <a:rPr b="1" sz="1300">
+              <a:rPr b="1" sz="1350">
                 <a:solidFill>
                   <a:srgbClr val="0F172A"/>
                 </a:solidFill>
@@ -3473,7 +3738,7 @@
               <a:t>階段二【四按鈕碼表實作】： </a:t>
             </a:r>
             <a:r>
-              <a:rPr b="0" sz="1300">
+              <a:rPr b="0" sz="1350">
                 <a:solidFill>
                   <a:srgbClr val="64748B"/>
                 </a:solidFill>
@@ -3484,12 +3749,15 @@
           </a:p>
           <a:p>
             <a:pPr>
+              <a:lnSpc>
+                <a:spcPct val="125000"/>
+              </a:lnSpc>
               <a:spcAft>
-                <a:spcPts val="600"/>
+                <a:spcPts val="700"/>
               </a:spcAft>
             </a:pPr>
             <a:r>
-              <a:rPr b="1" sz="1300">
+              <a:rPr b="1" sz="1350">
                 <a:solidFill>
                   <a:srgbClr val="0F172A"/>
                 </a:solidFill>
@@ -3498,7 +3766,7 @@
               <a:t>階段三【MQTT 雲端手機控制】： </a:t>
             </a:r>
             <a:r>
-              <a:rPr b="0" sz="1300">
+              <a:rPr b="0" sz="1350">
                 <a:solidFill>
                   <a:srgbClr val="64748B"/>
                 </a:solidFill>
@@ -3509,12 +3777,15 @@
           </a:p>
           <a:p>
             <a:pPr>
+              <a:lnSpc>
+                <a:spcPct val="125000"/>
+              </a:lnSpc>
               <a:spcAft>
-                <a:spcPts val="600"/>
+                <a:spcPts val="700"/>
               </a:spcAft>
             </a:pPr>
             <a:r>
-              <a:rPr b="1" sz="1300">
+              <a:rPr b="1" sz="1350">
                 <a:solidFill>
                   <a:srgbClr val="0F172A"/>
                 </a:solidFill>
@@ -3523,7 +3794,7 @@
               <a:t>階段四【AI 視覺與多模式切換】： </a:t>
             </a:r>
             <a:r>
-              <a:rPr b="0" sz="1300">
+              <a:rPr b="0" sz="1350">
                 <a:solidFill>
                   <a:srgbClr val="64748B"/>
                 </a:solidFill>
@@ -3534,12 +3805,15 @@
           </a:p>
           <a:p>
             <a:pPr>
+              <a:lnSpc>
+                <a:spcPct val="125000"/>
+              </a:lnSpc>
               <a:spcAft>
-                <a:spcPts val="600"/>
+                <a:spcPts val="700"/>
               </a:spcAft>
             </a:pPr>
             <a:r>
-              <a:rPr b="1" sz="1300">
+              <a:rPr b="1" sz="1350">
                 <a:solidFill>
                   <a:srgbClr val="0F172A"/>
                 </a:solidFill>
@@ -3548,7 +3822,7 @@
               <a:t>萬能【除錯修復指令】： </a:t>
             </a:r>
             <a:r>
-              <a:rPr b="0" sz="1300">
+              <a:rPr b="0" sz="1350">
                 <a:solidFill>
                   <a:srgbClr val="64748B"/>
                 </a:solidFill>
@@ -3564,6 +3838,9 @@
   <p:clrMapOvr>
     <a:masterClrMapping/>
   </p:clrMapOvr>
+  <p:transition spd="med">
+    <p:fade/>
+  </p:transition>
 </p:sld>
 </file>
 
@@ -3595,9 +3872,7 @@
             <a:srgbClr val="0F172A"/>
           </a:solidFill>
           <a:ln>
-            <a:solidFill>
-              <a:srgbClr val="0F172A"/>
-            </a:solidFill>
+            <a:noFill/>
           </a:ln>
         </p:spPr>
         <p:style>
@@ -3631,7 +3906,7 @@
         <p:spPr>
           <a:xfrm>
             <a:off x="1371600" y="1645920"/>
-            <a:ext cx="9418320" cy="3657600"/>
+            <a:ext cx="9418320" cy="3840480"/>
           </a:xfrm>
           <a:prstGeom prst="rect">
             <a:avLst/>
@@ -3648,7 +3923,7 @@
               <a:spcAft>
                 <a:spcPts val="2000"/>
               </a:spcAft>
-              <a:defRPr sz="2800" b="1">
+              <a:defRPr sz="3000" b="1">
                 <a:solidFill>
                   <a:srgbClr val="FFFFFF"/>
                 </a:solidFill>
@@ -3661,10 +3936,13 @@
           </a:p>
           <a:p>
             <a:pPr>
+              <a:lnSpc>
+                <a:spcPct val="135000"/>
+              </a:lnSpc>
               <a:spcAft>
                 <a:spcPts val="3000"/>
               </a:spcAft>
-              <a:defRPr sz="1700">
+              <a:defRPr sz="1800">
                 <a:solidFill>
                   <a:srgbClr val="0284C7"/>
                 </a:solidFill>
@@ -3681,7 +3959,7 @@
           </a:p>
           <a:p>
             <a:pPr>
-              <a:defRPr sz="1400" i="1">
+              <a:defRPr sz="1500" b="1">
                 <a:solidFill>
                   <a:srgbClr val="D97706"/>
                 </a:solidFill>
@@ -3689,7 +3967,7 @@
               </a:defRPr>
             </a:pPr>
             <a:r>
-              <a:t>💡 完整課程講義 Markdown 與獨立網頁已同步發布至 stjedu.github.io/www，歡迎直接取用！</a:t>
+              <a:t>🌐 線上課程與可複製 Prompt 講義：https://stjedu.github.io/www/esp32_mqtt_course.html</a:t>
             </a:r>
           </a:p>
         </p:txBody>
@@ -3699,6 +3977,9 @@
   <p:clrMapOvr>
     <a:masterClrMapping/>
   </p:clrMapOvr>
+  <p:transition spd="med">
+    <p:fade/>
+  </p:transition>
 </p:sld>
 </file>
 
@@ -3721,18 +4002,16 @@
         <p:spPr>
           <a:xfrm>
             <a:off x="0" y="0"/>
-            <a:ext cx="12191695" cy="1005840"/>
+            <a:ext cx="12191695" cy="6858000"/>
           </a:xfrm>
           <a:prstGeom prst="rect">
             <a:avLst/>
           </a:prstGeom>
           <a:solidFill>
-            <a:srgbClr val="0F172A"/>
+            <a:srgbClr val="F8FAFC"/>
           </a:solidFill>
           <a:ln>
-            <a:solidFill>
-              <a:srgbClr val="0F172A"/>
-            </a:solidFill>
+            <a:noFill/>
           </a:ln>
         </p:spPr>
         <p:style>
@@ -3759,14 +4038,100 @@
       </p:sp>
       <p:sp>
         <p:nvSpPr>
-          <p:cNvPr id="3" name="TextBox 2"/>
+          <p:cNvPr id="3" name="Rectangle 2"/>
+          <p:cNvSpPr/>
+          <p:nvPr/>
+        </p:nvSpPr>
+        <p:spPr>
+          <a:xfrm>
+            <a:off x="0" y="0"/>
+            <a:ext cx="12191695" cy="1051560"/>
+          </a:xfrm>
+          <a:prstGeom prst="rect">
+            <a:avLst/>
+          </a:prstGeom>
+          <a:solidFill>
+            <a:srgbClr val="0F172A"/>
+          </a:solidFill>
+          <a:ln>
+            <a:noFill/>
+          </a:ln>
+        </p:spPr>
+        <p:style>
+          <a:lnRef idx="1">
+            <a:schemeClr val="accent1"/>
+          </a:lnRef>
+          <a:fillRef idx="3">
+            <a:schemeClr val="accent1"/>
+          </a:fillRef>
+          <a:effectRef idx="2">
+            <a:schemeClr val="accent1"/>
+          </a:effectRef>
+          <a:fontRef idx="minor">
+            <a:schemeClr val="lt1"/>
+          </a:fontRef>
+        </p:style>
+        <p:txBody>
+          <a:bodyPr rtlCol="0" anchor="ctr"/>
+          <a:lstStyle/>
+          <a:p>
+            <a:pPr algn="ctr"/>
+          </a:p>
+        </p:txBody>
+      </p:sp>
+      <p:sp>
+        <p:nvSpPr>
+          <p:cNvPr id="4" name="Rectangle 3"/>
+          <p:cNvSpPr/>
+          <p:nvPr/>
+        </p:nvSpPr>
+        <p:spPr>
+          <a:xfrm>
+            <a:off x="0" y="1051560"/>
+            <a:ext cx="4114800" cy="45720"/>
+          </a:xfrm>
+          <a:prstGeom prst="rect">
+            <a:avLst/>
+          </a:prstGeom>
+          <a:solidFill>
+            <a:srgbClr val="0284C7"/>
+          </a:solidFill>
+          <a:ln>
+            <a:noFill/>
+          </a:ln>
+        </p:spPr>
+        <p:style>
+          <a:lnRef idx="1">
+            <a:schemeClr val="accent1"/>
+          </a:lnRef>
+          <a:fillRef idx="3">
+            <a:schemeClr val="accent1"/>
+          </a:fillRef>
+          <a:effectRef idx="2">
+            <a:schemeClr val="accent1"/>
+          </a:effectRef>
+          <a:fontRef idx="minor">
+            <a:schemeClr val="lt1"/>
+          </a:fontRef>
+        </p:style>
+        <p:txBody>
+          <a:bodyPr rtlCol="0" anchor="ctr"/>
+          <a:lstStyle/>
+          <a:p>
+            <a:pPr algn="ctr"/>
+          </a:p>
+        </p:txBody>
+      </p:sp>
+      <p:sp>
+        <p:nvSpPr>
+          <p:cNvPr id="5" name="TextBox 4"/>
           <p:cNvSpPr txBox="1"/>
           <p:nvPr/>
         </p:nvSpPr>
         <p:spPr>
           <a:xfrm>
             <a:off x="731520" y="109728"/>
-            <a:ext cx="10698480" cy="274320"/>
+            <a:ext cx="7772400" cy="274320"/>
           </a:xfrm>
           <a:prstGeom prst="rect">
             <a:avLst/>
@@ -3780,7 +4145,7 @@
           <a:lstStyle/>
           <a:p>
             <a:pPr>
-              <a:defRPr sz="1100" b="1">
+              <a:defRPr sz="1150" b="1">
                 <a:solidFill>
                   <a:srgbClr val="0284C7"/>
                 </a:solidFill>
@@ -3788,20 +4153,56 @@
               </a:defRPr>
             </a:pPr>
             <a:r>
-              <a:t>ESP32 ✕ 物聯網 MQTT ✕ 邊緣 AI 實戰</a:t>
-            </a:r>
-          </a:p>
-        </p:txBody>
-      </p:sp>
-      <p:sp>
-        <p:nvSpPr>
-          <p:cNvPr id="4" name="TextBox 3"/>
+              <a:t>📡 ESP32 ✕ 物聯網 MQTT ✕ 邊緣 AI 實戰</a:t>
+            </a:r>
+          </a:p>
+        </p:txBody>
+      </p:sp>
+      <p:sp>
+        <p:nvSpPr>
+          <p:cNvPr id="6" name="TextBox 5"/>
           <p:cNvSpPr txBox="1"/>
           <p:nvPr/>
         </p:nvSpPr>
         <p:spPr>
           <a:xfrm>
-            <a:off x="731520" y="320040"/>
+            <a:off x="9144000" y="109728"/>
+            <a:ext cx="2286000" cy="274320"/>
+          </a:xfrm>
+          <a:prstGeom prst="rect">
+            <a:avLst/>
+          </a:prstGeom>
+          <a:noFill/>
+        </p:spPr>
+        <p:txBody>
+          <a:bodyPr wrap="none">
+            <a:spAutoFit/>
+          </a:bodyPr>
+          <a:lstStyle/>
+          <a:p>
+            <a:pPr algn="r">
+              <a:defRPr sz="1200" b="1">
+                <a:solidFill>
+                  <a:srgbClr val="B4C8E1"/>
+                </a:solidFill>
+                <a:latin typeface="微軟正黑體"/>
+              </a:defRPr>
+            </a:pPr>
+            <a:r>
+              <a:t>第 02 / 11 頁</a:t>
+            </a:r>
+          </a:p>
+        </p:txBody>
+      </p:sp>
+      <p:sp>
+        <p:nvSpPr>
+          <p:cNvPr id="7" name="TextBox 6"/>
+          <p:cNvSpPr txBox="1"/>
+          <p:nvPr/>
+        </p:nvSpPr>
+        <p:spPr>
+          <a:xfrm>
+            <a:off x="731520" y="365760"/>
             <a:ext cx="10698480" cy="594360"/>
           </a:xfrm>
           <a:prstGeom prst="rect">
@@ -3816,7 +4217,7 @@
           <a:lstStyle/>
           <a:p>
             <a:pPr>
-              <a:defRPr sz="2200" b="1">
+              <a:defRPr sz="2400" b="1">
                 <a:solidFill>
                   <a:srgbClr val="FFFFFF"/>
                 </a:solidFill>
@@ -3831,14 +4232,50 @@
       </p:sp>
       <p:sp>
         <p:nvSpPr>
-          <p:cNvPr id="5" name="Rounded Rectangle 4"/>
+          <p:cNvPr id="8" name="TextBox 7"/>
+          <p:cNvSpPr txBox="1"/>
+          <p:nvPr/>
+        </p:nvSpPr>
+        <p:spPr>
+          <a:xfrm>
+            <a:off x="731520" y="6510528"/>
+            <a:ext cx="10698480" cy="274320"/>
+          </a:xfrm>
+          <a:prstGeom prst="rect">
+            <a:avLst/>
+          </a:prstGeom>
+          <a:noFill/>
+        </p:spPr>
+        <p:txBody>
+          <a:bodyPr wrap="none">
+            <a:spAutoFit/>
+          </a:bodyPr>
+          <a:lstStyle/>
+          <a:p>
+            <a:pPr>
+              <a:defRPr sz="1050">
+                <a:solidFill>
+                  <a:srgbClr val="64748B"/>
+                </a:solidFill>
+                <a:latin typeface="微軟正黑體"/>
+              </a:defRPr>
+            </a:pPr>
+            <a:r>
+              <a:t>🌐 互動課程網頁：https://stjedu.github.io/www/esp32_mqtt_course.html   |   主講：簡樹桐 老師</a:t>
+            </a:r>
+          </a:p>
+        </p:txBody>
+      </p:sp>
+      <p:sp>
+        <p:nvSpPr>
+          <p:cNvPr id="9" name="Rounded Rectangle 8"/>
           <p:cNvSpPr/>
           <p:nvPr/>
         </p:nvSpPr>
         <p:spPr>
           <a:xfrm>
-            <a:off x="731520" y="1371600"/>
-            <a:ext cx="5120640" cy="4937760"/>
+            <a:off x="731520" y="1325880"/>
+            <a:ext cx="5120640" cy="4983480"/>
           </a:xfrm>
           <a:prstGeom prst="roundRect">
             <a:avLst/>
@@ -3876,14 +4313,57 @@
       </p:sp>
       <p:sp>
         <p:nvSpPr>
-          <p:cNvPr id="6" name="TextBox 5"/>
+          <p:cNvPr id="10" name="Rounded Rectangle 9"/>
+          <p:cNvSpPr/>
+          <p:nvPr/>
+        </p:nvSpPr>
+        <p:spPr>
+          <a:xfrm>
+            <a:off x="731520" y="1325880"/>
+            <a:ext cx="5120640" cy="91440"/>
+          </a:xfrm>
+          <a:prstGeom prst="roundRect">
+            <a:avLst/>
+          </a:prstGeom>
+          <a:solidFill>
+            <a:srgbClr val="0284C7"/>
+          </a:solidFill>
+          <a:ln>
+            <a:noFill/>
+          </a:ln>
+        </p:spPr>
+        <p:style>
+          <a:lnRef idx="1">
+            <a:schemeClr val="accent1"/>
+          </a:lnRef>
+          <a:fillRef idx="3">
+            <a:schemeClr val="accent1"/>
+          </a:fillRef>
+          <a:effectRef idx="2">
+            <a:schemeClr val="accent1"/>
+          </a:effectRef>
+          <a:fontRef idx="minor">
+            <a:schemeClr val="lt1"/>
+          </a:fontRef>
+        </p:style>
+        <p:txBody>
+          <a:bodyPr rtlCol="0" anchor="ctr"/>
+          <a:lstStyle/>
+          <a:p>
+            <a:pPr algn="ctr"/>
+          </a:p>
+        </p:txBody>
+      </p:sp>
+      <p:sp>
+        <p:nvSpPr>
+          <p:cNvPr id="11" name="TextBox 10"/>
           <p:cNvSpPr txBox="1"/>
           <p:nvPr/>
         </p:nvSpPr>
         <p:spPr>
           <a:xfrm>
-            <a:off x="914400" y="1508760"/>
-            <a:ext cx="4754880" cy="4663440"/>
+            <a:off x="960120" y="1508760"/>
+            <a:ext cx="4663440" cy="4663440"/>
           </a:xfrm>
           <a:prstGeom prst="rect">
             <a:avLst/>
@@ -3900,7 +4380,7 @@
               <a:spcAft>
                 <a:spcPts val="1000"/>
               </a:spcAft>
-              <a:defRPr sz="1600" b="1">
+              <a:defRPr sz="1750" b="1">
                 <a:solidFill>
                   <a:srgbClr val="0F172A"/>
                 </a:solidFill>
@@ -3913,12 +4393,15 @@
           </a:p>
           <a:p>
             <a:pPr>
+              <a:lnSpc>
+                <a:spcPct val="125000"/>
+              </a:lnSpc>
               <a:spcAft>
-                <a:spcPts val="600"/>
+                <a:spcPts val="700"/>
               </a:spcAft>
             </a:pPr>
             <a:r>
-              <a:rPr b="1" sz="1300">
+              <a:rPr b="1" sz="1350">
                 <a:solidFill>
                   <a:srgbClr val="0F172A"/>
                 </a:solidFill>
@@ -3927,7 +4410,7 @@
               <a:t>陌生物件不要怕： </a:t>
             </a:r>
             <a:r>
-              <a:rPr b="0" sz="1300">
+              <a:rPr b="0" sz="1350">
                 <a:solidFill>
                   <a:srgbClr val="64748B"/>
                 </a:solidFill>
@@ -3938,12 +4421,15 @@
           </a:p>
           <a:p>
             <a:pPr>
+              <a:lnSpc>
+                <a:spcPct val="125000"/>
+              </a:lnSpc>
               <a:spcAft>
-                <a:spcPts val="600"/>
+                <a:spcPts val="700"/>
               </a:spcAft>
             </a:pPr>
             <a:r>
-              <a:rPr b="1" sz="1300">
+              <a:rPr b="1" sz="1350">
                 <a:solidFill>
                   <a:srgbClr val="0F172A"/>
                 </a:solidFill>
@@ -3952,7 +4438,7 @@
               <a:t>硬體插拔防呆： </a:t>
             </a:r>
             <a:r>
-              <a:rPr b="0" sz="1300">
+              <a:rPr b="0" sz="1350">
                 <a:solidFill>
                   <a:srgbClr val="64748B"/>
                 </a:solidFill>
@@ -3963,12 +4449,15 @@
           </a:p>
           <a:p>
             <a:pPr>
+              <a:lnSpc>
+                <a:spcPct val="125000"/>
+              </a:lnSpc>
               <a:spcAft>
-                <a:spcPts val="600"/>
+                <a:spcPts val="700"/>
               </a:spcAft>
             </a:pPr>
             <a:r>
-              <a:rPr b="1" sz="1300">
+              <a:rPr b="1" sz="1350">
                 <a:solidFill>
                   <a:srgbClr val="0F172A"/>
                 </a:solidFill>
@@ -3977,7 +4466,7 @@
               <a:t>Agent 自動執行設定： </a:t>
             </a:r>
             <a:r>
-              <a:rPr b="0" sz="1300">
+              <a:rPr b="0" sz="1350">
                 <a:solidFill>
                   <a:srgbClr val="64748B"/>
                 </a:solidFill>
@@ -3988,12 +4477,15 @@
           </a:p>
           <a:p>
             <a:pPr>
+              <a:lnSpc>
+                <a:spcPct val="125000"/>
+              </a:lnSpc>
               <a:spcAft>
-                <a:spcPts val="600"/>
+                <a:spcPts val="700"/>
               </a:spcAft>
             </a:pPr>
             <a:r>
-              <a:rPr b="1" sz="1300">
+              <a:rPr b="1" sz="1350">
                 <a:solidFill>
                   <a:srgbClr val="0F172A"/>
                 </a:solidFill>
@@ -4002,7 +4494,7 @@
               <a:t>從邊緣到雲端： </a:t>
             </a:r>
             <a:r>
-              <a:rPr b="0" sz="1300">
+              <a:rPr b="0" sz="1350">
                 <a:solidFill>
                   <a:srgbClr val="64748B"/>
                 </a:solidFill>
@@ -4015,14 +4507,14 @@
       </p:sp>
       <p:sp>
         <p:nvSpPr>
-          <p:cNvPr id="7" name="Rounded Rectangle 6"/>
+          <p:cNvPr id="12" name="Rounded Rectangle 11"/>
           <p:cNvSpPr/>
           <p:nvPr/>
         </p:nvSpPr>
         <p:spPr>
           <a:xfrm>
-            <a:off x="6309360" y="1371600"/>
-            <a:ext cx="5120640" cy="4937760"/>
+            <a:off x="6309360" y="1325880"/>
+            <a:ext cx="5120640" cy="4983480"/>
           </a:xfrm>
           <a:prstGeom prst="roundRect">
             <a:avLst/>
@@ -4060,14 +4552,57 @@
       </p:sp>
       <p:sp>
         <p:nvSpPr>
-          <p:cNvPr id="8" name="TextBox 7"/>
+          <p:cNvPr id="13" name="Rounded Rectangle 12"/>
+          <p:cNvSpPr/>
+          <p:nvPr/>
+        </p:nvSpPr>
+        <p:spPr>
+          <a:xfrm>
+            <a:off x="6309360" y="1325880"/>
+            <a:ext cx="5120640" cy="91440"/>
+          </a:xfrm>
+          <a:prstGeom prst="roundRect">
+            <a:avLst/>
+          </a:prstGeom>
+          <a:solidFill>
+            <a:srgbClr val="D97706"/>
+          </a:solidFill>
+          <a:ln>
+            <a:noFill/>
+          </a:ln>
+        </p:spPr>
+        <p:style>
+          <a:lnRef idx="1">
+            <a:schemeClr val="accent1"/>
+          </a:lnRef>
+          <a:fillRef idx="3">
+            <a:schemeClr val="accent1"/>
+          </a:fillRef>
+          <a:effectRef idx="2">
+            <a:schemeClr val="accent1"/>
+          </a:effectRef>
+          <a:fontRef idx="minor">
+            <a:schemeClr val="lt1"/>
+          </a:fontRef>
+        </p:style>
+        <p:txBody>
+          <a:bodyPr rtlCol="0" anchor="ctr"/>
+          <a:lstStyle/>
+          <a:p>
+            <a:pPr algn="ctr"/>
+          </a:p>
+        </p:txBody>
+      </p:sp>
+      <p:sp>
+        <p:nvSpPr>
+          <p:cNvPr id="14" name="TextBox 13"/>
           <p:cNvSpPr txBox="1"/>
           <p:nvPr/>
         </p:nvSpPr>
         <p:spPr>
           <a:xfrm>
-            <a:off x="6492240" y="1508760"/>
-            <a:ext cx="4754880" cy="4663440"/>
+            <a:off x="6537960" y="1508760"/>
+            <a:ext cx="4663440" cy="4663440"/>
           </a:xfrm>
           <a:prstGeom prst="rect">
             <a:avLst/>
@@ -4084,7 +4619,7 @@
               <a:spcAft>
                 <a:spcPts val="1000"/>
               </a:spcAft>
-              <a:defRPr sz="1600" b="1">
+              <a:defRPr sz="1750" b="1">
                 <a:solidFill>
                   <a:srgbClr val="0F172A"/>
                 </a:solidFill>
@@ -4097,12 +4632,15 @@
           </a:p>
           <a:p>
             <a:pPr>
+              <a:lnSpc>
+                <a:spcPct val="125000"/>
+              </a:lnSpc>
               <a:spcAft>
-                <a:spcPts val="600"/>
+                <a:spcPts val="700"/>
               </a:spcAft>
             </a:pPr>
             <a:r>
-              <a:rPr b="1" sz="1300">
+              <a:rPr b="1" sz="1350">
                 <a:solidFill>
                   <a:srgbClr val="0F172A"/>
                 </a:solidFill>
@@ -4111,7 +4649,7 @@
               <a:t>第 01 節課：ESP32 與感測器電路實作 </a:t>
             </a:r>
             <a:r>
-              <a:rPr b="0" sz="1300">
+              <a:rPr b="0" sz="1350">
                 <a:solidFill>
                   <a:srgbClr val="64748B"/>
                 </a:solidFill>
@@ -4122,12 +4660,15 @@
           </a:p>
           <a:p>
             <a:pPr>
+              <a:lnSpc>
+                <a:spcPct val="125000"/>
+              </a:lnSpc>
               <a:spcAft>
-                <a:spcPts val="600"/>
+                <a:spcPts val="700"/>
               </a:spcAft>
             </a:pPr>
             <a:r>
-              <a:rPr b="1" sz="1300">
+              <a:rPr b="1" sz="1350">
                 <a:solidFill>
                   <a:srgbClr val="0F172A"/>
                 </a:solidFill>
@@ -4136,7 +4677,7 @@
               <a:t>第 02 節課：MQTT 協定與手機 App 智慧控制 </a:t>
             </a:r>
             <a:r>
-              <a:rPr b="0" sz="1300">
+              <a:rPr b="0" sz="1350">
                 <a:solidFill>
                   <a:srgbClr val="64748B"/>
                 </a:solidFill>
@@ -4147,12 +4688,15 @@
           </a:p>
           <a:p>
             <a:pPr>
+              <a:lnSpc>
+                <a:spcPct val="125000"/>
+              </a:lnSpc>
               <a:spcAft>
-                <a:spcPts val="600"/>
+                <a:spcPts val="700"/>
               </a:spcAft>
             </a:pPr>
             <a:r>
-              <a:rPr b="1" sz="1300">
+              <a:rPr b="1" sz="1350">
                 <a:solidFill>
                   <a:srgbClr val="0F172A"/>
                 </a:solidFill>
@@ -4161,7 +4705,7 @@
               <a:t>第 03 節課：AI 視覺影像辨識初探與連動 </a:t>
             </a:r>
             <a:r>
-              <a:rPr b="0" sz="1300">
+              <a:rPr b="0" sz="1350">
                 <a:solidFill>
                   <a:srgbClr val="64748B"/>
                 </a:solidFill>
@@ -4177,6 +4721,9 @@
   <p:clrMapOvr>
     <a:masterClrMapping/>
   </p:clrMapOvr>
+  <p:transition spd="med">
+    <p:fade/>
+  </p:transition>
 </p:sld>
 </file>
 
@@ -4199,18 +4746,16 @@
         <p:spPr>
           <a:xfrm>
             <a:off x="0" y="0"/>
-            <a:ext cx="12191695" cy="1005840"/>
+            <a:ext cx="12191695" cy="6858000"/>
           </a:xfrm>
           <a:prstGeom prst="rect">
             <a:avLst/>
           </a:prstGeom>
           <a:solidFill>
-            <a:srgbClr val="0F172A"/>
+            <a:srgbClr val="F8FAFC"/>
           </a:solidFill>
           <a:ln>
-            <a:solidFill>
-              <a:srgbClr val="0F172A"/>
-            </a:solidFill>
+            <a:noFill/>
           </a:ln>
         </p:spPr>
         <p:style>
@@ -4237,14 +4782,100 @@
       </p:sp>
       <p:sp>
         <p:nvSpPr>
-          <p:cNvPr id="3" name="TextBox 2"/>
+          <p:cNvPr id="3" name="Rectangle 2"/>
+          <p:cNvSpPr/>
+          <p:nvPr/>
+        </p:nvSpPr>
+        <p:spPr>
+          <a:xfrm>
+            <a:off x="0" y="0"/>
+            <a:ext cx="12191695" cy="1051560"/>
+          </a:xfrm>
+          <a:prstGeom prst="rect">
+            <a:avLst/>
+          </a:prstGeom>
+          <a:solidFill>
+            <a:srgbClr val="0F172A"/>
+          </a:solidFill>
+          <a:ln>
+            <a:noFill/>
+          </a:ln>
+        </p:spPr>
+        <p:style>
+          <a:lnRef idx="1">
+            <a:schemeClr val="accent1"/>
+          </a:lnRef>
+          <a:fillRef idx="3">
+            <a:schemeClr val="accent1"/>
+          </a:fillRef>
+          <a:effectRef idx="2">
+            <a:schemeClr val="accent1"/>
+          </a:effectRef>
+          <a:fontRef idx="minor">
+            <a:schemeClr val="lt1"/>
+          </a:fontRef>
+        </p:style>
+        <p:txBody>
+          <a:bodyPr rtlCol="0" anchor="ctr"/>
+          <a:lstStyle/>
+          <a:p>
+            <a:pPr algn="ctr"/>
+          </a:p>
+        </p:txBody>
+      </p:sp>
+      <p:sp>
+        <p:nvSpPr>
+          <p:cNvPr id="4" name="Rectangle 3"/>
+          <p:cNvSpPr/>
+          <p:nvPr/>
+        </p:nvSpPr>
+        <p:spPr>
+          <a:xfrm>
+            <a:off x="0" y="1051560"/>
+            <a:ext cx="4114800" cy="45720"/>
+          </a:xfrm>
+          <a:prstGeom prst="rect">
+            <a:avLst/>
+          </a:prstGeom>
+          <a:solidFill>
+            <a:srgbClr val="0284C7"/>
+          </a:solidFill>
+          <a:ln>
+            <a:noFill/>
+          </a:ln>
+        </p:spPr>
+        <p:style>
+          <a:lnRef idx="1">
+            <a:schemeClr val="accent1"/>
+          </a:lnRef>
+          <a:fillRef idx="3">
+            <a:schemeClr val="accent1"/>
+          </a:fillRef>
+          <a:effectRef idx="2">
+            <a:schemeClr val="accent1"/>
+          </a:effectRef>
+          <a:fontRef idx="minor">
+            <a:schemeClr val="lt1"/>
+          </a:fontRef>
+        </p:style>
+        <p:txBody>
+          <a:bodyPr rtlCol="0" anchor="ctr"/>
+          <a:lstStyle/>
+          <a:p>
+            <a:pPr algn="ctr"/>
+          </a:p>
+        </p:txBody>
+      </p:sp>
+      <p:sp>
+        <p:nvSpPr>
+          <p:cNvPr id="5" name="TextBox 4"/>
           <p:cNvSpPr txBox="1"/>
           <p:nvPr/>
         </p:nvSpPr>
         <p:spPr>
           <a:xfrm>
             <a:off x="731520" y="109728"/>
-            <a:ext cx="10698480" cy="274320"/>
+            <a:ext cx="7772400" cy="274320"/>
           </a:xfrm>
           <a:prstGeom prst="rect">
             <a:avLst/>
@@ -4258,7 +4889,7 @@
           <a:lstStyle/>
           <a:p>
             <a:pPr>
-              <a:defRPr sz="1100" b="1">
+              <a:defRPr sz="1150" b="1">
                 <a:solidFill>
                   <a:srgbClr val="0284C7"/>
                 </a:solidFill>
@@ -4266,20 +4897,56 @@
               </a:defRPr>
             </a:pPr>
             <a:r>
-              <a:t>ESP32 ✕ 物聯網 MQTT ✕ 邊緣 AI 實戰</a:t>
-            </a:r>
-          </a:p>
-        </p:txBody>
-      </p:sp>
-      <p:sp>
-        <p:nvSpPr>
-          <p:cNvPr id="4" name="TextBox 3"/>
+              <a:t>📡 ESP32 ✕ 物聯網 MQTT ✕ 邊緣 AI 實戰</a:t>
+            </a:r>
+          </a:p>
+        </p:txBody>
+      </p:sp>
+      <p:sp>
+        <p:nvSpPr>
+          <p:cNvPr id="6" name="TextBox 5"/>
           <p:cNvSpPr txBox="1"/>
           <p:nvPr/>
         </p:nvSpPr>
         <p:spPr>
           <a:xfrm>
-            <a:off x="731520" y="320040"/>
+            <a:off x="9144000" y="109728"/>
+            <a:ext cx="2286000" cy="274320"/>
+          </a:xfrm>
+          <a:prstGeom prst="rect">
+            <a:avLst/>
+          </a:prstGeom>
+          <a:noFill/>
+        </p:spPr>
+        <p:txBody>
+          <a:bodyPr wrap="none">
+            <a:spAutoFit/>
+          </a:bodyPr>
+          <a:lstStyle/>
+          <a:p>
+            <a:pPr algn="r">
+              <a:defRPr sz="1200" b="1">
+                <a:solidFill>
+                  <a:srgbClr val="B4C8E1"/>
+                </a:solidFill>
+                <a:latin typeface="微軟正黑體"/>
+              </a:defRPr>
+            </a:pPr>
+            <a:r>
+              <a:t>第 03 / 11 頁</a:t>
+            </a:r>
+          </a:p>
+        </p:txBody>
+      </p:sp>
+      <p:sp>
+        <p:nvSpPr>
+          <p:cNvPr id="7" name="TextBox 6"/>
+          <p:cNvSpPr txBox="1"/>
+          <p:nvPr/>
+        </p:nvSpPr>
+        <p:spPr>
+          <a:xfrm>
+            <a:off x="731520" y="365760"/>
             <a:ext cx="10698480" cy="594360"/>
           </a:xfrm>
           <a:prstGeom prst="rect">
@@ -4294,7 +4961,7 @@
           <a:lstStyle/>
           <a:p>
             <a:pPr>
-              <a:defRPr sz="2200" b="1">
+              <a:defRPr sz="2400" b="1">
                 <a:solidFill>
                   <a:srgbClr val="FFFFFF"/>
                 </a:solidFill>
@@ -4309,14 +4976,50 @@
       </p:sp>
       <p:sp>
         <p:nvSpPr>
-          <p:cNvPr id="5" name="Rounded Rectangle 4"/>
+          <p:cNvPr id="8" name="TextBox 7"/>
+          <p:cNvSpPr txBox="1"/>
+          <p:nvPr/>
+        </p:nvSpPr>
+        <p:spPr>
+          <a:xfrm>
+            <a:off x="731520" y="6510528"/>
+            <a:ext cx="10698480" cy="274320"/>
+          </a:xfrm>
+          <a:prstGeom prst="rect">
+            <a:avLst/>
+          </a:prstGeom>
+          <a:noFill/>
+        </p:spPr>
+        <p:txBody>
+          <a:bodyPr wrap="none">
+            <a:spAutoFit/>
+          </a:bodyPr>
+          <a:lstStyle/>
+          <a:p>
+            <a:pPr>
+              <a:defRPr sz="1050">
+                <a:solidFill>
+                  <a:srgbClr val="64748B"/>
+                </a:solidFill>
+                <a:latin typeface="微軟正黑體"/>
+              </a:defRPr>
+            </a:pPr>
+            <a:r>
+              <a:t>🌐 互動課程網頁：https://stjedu.github.io/www/esp32_mqtt_course.html   |   主講：簡樹桐 老師</a:t>
+            </a:r>
+          </a:p>
+        </p:txBody>
+      </p:sp>
+      <p:sp>
+        <p:nvSpPr>
+          <p:cNvPr id="9" name="Rounded Rectangle 8"/>
           <p:cNvSpPr/>
           <p:nvPr/>
         </p:nvSpPr>
         <p:spPr>
           <a:xfrm>
-            <a:off x="731520" y="1371600"/>
-            <a:ext cx="5120640" cy="4937760"/>
+            <a:off x="731520" y="1325880"/>
+            <a:ext cx="5120640" cy="4983480"/>
           </a:xfrm>
           <a:prstGeom prst="roundRect">
             <a:avLst/>
@@ -4354,14 +5057,57 @@
       </p:sp>
       <p:sp>
         <p:nvSpPr>
-          <p:cNvPr id="6" name="TextBox 5"/>
+          <p:cNvPr id="10" name="Rounded Rectangle 9"/>
+          <p:cNvSpPr/>
+          <p:nvPr/>
+        </p:nvSpPr>
+        <p:spPr>
+          <a:xfrm>
+            <a:off x="731520" y="1325880"/>
+            <a:ext cx="5120640" cy="91440"/>
+          </a:xfrm>
+          <a:prstGeom prst="roundRect">
+            <a:avLst/>
+          </a:prstGeom>
+          <a:solidFill>
+            <a:srgbClr val="0284C7"/>
+          </a:solidFill>
+          <a:ln>
+            <a:noFill/>
+          </a:ln>
+        </p:spPr>
+        <p:style>
+          <a:lnRef idx="1">
+            <a:schemeClr val="accent1"/>
+          </a:lnRef>
+          <a:fillRef idx="3">
+            <a:schemeClr val="accent1"/>
+          </a:fillRef>
+          <a:effectRef idx="2">
+            <a:schemeClr val="accent1"/>
+          </a:effectRef>
+          <a:fontRef idx="minor">
+            <a:schemeClr val="lt1"/>
+          </a:fontRef>
+        </p:style>
+        <p:txBody>
+          <a:bodyPr rtlCol="0" anchor="ctr"/>
+          <a:lstStyle/>
+          <a:p>
+            <a:pPr algn="ctr"/>
+          </a:p>
+        </p:txBody>
+      </p:sp>
+      <p:sp>
+        <p:nvSpPr>
+          <p:cNvPr id="11" name="TextBox 10"/>
           <p:cNvSpPr txBox="1"/>
           <p:nvPr/>
         </p:nvSpPr>
         <p:spPr>
           <a:xfrm>
-            <a:off x="914400" y="1508760"/>
-            <a:ext cx="4754880" cy="4663440"/>
+            <a:off x="960120" y="1508760"/>
+            <a:ext cx="4663440" cy="4663440"/>
           </a:xfrm>
           <a:prstGeom prst="rect">
             <a:avLst/>
@@ -4378,7 +5124,7 @@
               <a:spcAft>
                 <a:spcPts val="1000"/>
               </a:spcAft>
-              <a:defRPr sz="1600" b="1">
+              <a:defRPr sz="1750" b="1">
                 <a:solidFill>
                   <a:srgbClr val="0F172A"/>
                 </a:solidFill>
@@ -4391,12 +5137,15 @@
           </a:p>
           <a:p>
             <a:pPr>
+              <a:lnSpc>
+                <a:spcPct val="125000"/>
+              </a:lnSpc>
               <a:spcAft>
-                <a:spcPts val="600"/>
+                <a:spcPts val="700"/>
               </a:spcAft>
             </a:pPr>
             <a:r>
-              <a:rPr b="1" sz="1300">
+              <a:rPr b="1" sz="1350">
                 <a:solidFill>
                   <a:srgbClr val="0F172A"/>
                 </a:solidFill>
@@ -4405,7 +5154,7 @@
               <a:t>AI 代理人權限配置： </a:t>
             </a:r>
             <a:r>
-              <a:rPr b="0" sz="1300">
+              <a:rPr b="0" sz="1350">
                 <a:solidFill>
                   <a:srgbClr val="64748B"/>
                 </a:solidFill>
@@ -4416,12 +5165,15 @@
           </a:p>
           <a:p>
             <a:pPr>
+              <a:lnSpc>
+                <a:spcPct val="125000"/>
+              </a:lnSpc>
               <a:spcAft>
-                <a:spcPts val="600"/>
+                <a:spcPts val="700"/>
               </a:spcAft>
             </a:pPr>
             <a:r>
-              <a:rPr b="1" sz="1300">
+              <a:rPr b="1" sz="1350">
                 <a:solidFill>
                   <a:srgbClr val="0F172A"/>
                 </a:solidFill>
@@ -4430,7 +5182,7 @@
               <a:t>硬體插拔防損原則： </a:t>
             </a:r>
             <a:r>
-              <a:rPr b="0" sz="1300">
+              <a:rPr b="0" sz="1350">
                 <a:solidFill>
                   <a:srgbClr val="64748B"/>
                 </a:solidFill>
@@ -4441,12 +5193,15 @@
           </a:p>
           <a:p>
             <a:pPr>
+              <a:lnSpc>
+                <a:spcPct val="125000"/>
+              </a:lnSpc>
               <a:spcAft>
-                <a:spcPts val="600"/>
+                <a:spcPts val="700"/>
               </a:spcAft>
             </a:pPr>
             <a:r>
-              <a:rPr b="1" sz="1300">
+              <a:rPr b="1" sz="1350">
                 <a:solidFill>
                   <a:srgbClr val="0F172A"/>
                 </a:solidFill>
@@ -4455,7 +5210,7 @@
               <a:t>BME280 感測器原理： </a:t>
             </a:r>
             <a:r>
-              <a:rPr b="0" sz="1300">
+              <a:rPr b="0" sz="1350">
                 <a:solidFill>
                   <a:srgbClr val="64748B"/>
                 </a:solidFill>
@@ -4466,12 +5221,15 @@
           </a:p>
           <a:p>
             <a:pPr>
+              <a:lnSpc>
+                <a:spcPct val="125000"/>
+              </a:lnSpc>
               <a:spcAft>
-                <a:spcPts val="600"/>
+                <a:spcPts val="700"/>
               </a:spcAft>
             </a:pPr>
             <a:r>
-              <a:rPr b="1" sz="1300">
+              <a:rPr b="1" sz="1350">
                 <a:solidFill>
                   <a:srgbClr val="0F172A"/>
                 </a:solidFill>
@@ -4480,7 +5238,7 @@
               <a:t>I2C 匯流排並聯： </a:t>
             </a:r>
             <a:r>
-              <a:rPr b="0" sz="1300">
+              <a:rPr b="0" sz="1350">
                 <a:solidFill>
                   <a:srgbClr val="64748B"/>
                 </a:solidFill>
@@ -4493,14 +5251,14 @@
       </p:sp>
       <p:sp>
         <p:nvSpPr>
-          <p:cNvPr id="7" name="Rounded Rectangle 6"/>
+          <p:cNvPr id="12" name="Rounded Rectangle 11"/>
           <p:cNvSpPr/>
           <p:nvPr/>
         </p:nvSpPr>
         <p:spPr>
           <a:xfrm>
-            <a:off x="6309360" y="1371600"/>
-            <a:ext cx="5120640" cy="4937760"/>
+            <a:off x="6309360" y="1325880"/>
+            <a:ext cx="5120640" cy="4983480"/>
           </a:xfrm>
           <a:prstGeom prst="roundRect">
             <a:avLst/>
@@ -4538,14 +5296,57 @@
       </p:sp>
       <p:sp>
         <p:nvSpPr>
-          <p:cNvPr id="8" name="TextBox 7"/>
+          <p:cNvPr id="13" name="Rounded Rectangle 12"/>
+          <p:cNvSpPr/>
+          <p:nvPr/>
+        </p:nvSpPr>
+        <p:spPr>
+          <a:xfrm>
+            <a:off x="6309360" y="1325880"/>
+            <a:ext cx="5120640" cy="91440"/>
+          </a:xfrm>
+          <a:prstGeom prst="roundRect">
+            <a:avLst/>
+          </a:prstGeom>
+          <a:solidFill>
+            <a:srgbClr val="D97706"/>
+          </a:solidFill>
+          <a:ln>
+            <a:noFill/>
+          </a:ln>
+        </p:spPr>
+        <p:style>
+          <a:lnRef idx="1">
+            <a:schemeClr val="accent1"/>
+          </a:lnRef>
+          <a:fillRef idx="3">
+            <a:schemeClr val="accent1"/>
+          </a:fillRef>
+          <a:effectRef idx="2">
+            <a:schemeClr val="accent1"/>
+          </a:effectRef>
+          <a:fontRef idx="minor">
+            <a:schemeClr val="lt1"/>
+          </a:fontRef>
+        </p:style>
+        <p:txBody>
+          <a:bodyPr rtlCol="0" anchor="ctr"/>
+          <a:lstStyle/>
+          <a:p>
+            <a:pPr algn="ctr"/>
+          </a:p>
+        </p:txBody>
+      </p:sp>
+      <p:sp>
+        <p:nvSpPr>
+          <p:cNvPr id="14" name="TextBox 13"/>
           <p:cNvSpPr txBox="1"/>
           <p:nvPr/>
         </p:nvSpPr>
         <p:spPr>
           <a:xfrm>
-            <a:off x="6492240" y="1508760"/>
-            <a:ext cx="4754880" cy="4663440"/>
+            <a:off x="6537960" y="1508760"/>
+            <a:ext cx="4663440" cy="4663440"/>
           </a:xfrm>
           <a:prstGeom prst="rect">
             <a:avLst/>
@@ -4562,7 +5363,7 @@
               <a:spcAft>
                 <a:spcPts val="1000"/>
               </a:spcAft>
-              <a:defRPr sz="1600" b="1">
+              <a:defRPr sz="1750" b="1">
                 <a:solidFill>
                   <a:srgbClr val="0F172A"/>
                 </a:solidFill>
@@ -4575,12 +5376,15 @@
           </a:p>
           <a:p>
             <a:pPr>
+              <a:lnSpc>
+                <a:spcPct val="125000"/>
+              </a:lnSpc>
               <a:spcAft>
-                <a:spcPts val="600"/>
+                <a:spcPts val="700"/>
               </a:spcAft>
             </a:pPr>
             <a:r>
-              <a:rPr b="1" sz="1300">
+              <a:rPr b="1" sz="1350">
                 <a:solidFill>
                   <a:srgbClr val="0F172A"/>
                 </a:solidFill>
@@ -4589,7 +5393,7 @@
               <a:t>BME280 SCL ➔ </a:t>
             </a:r>
             <a:r>
-              <a:rPr b="0" sz="1300">
+              <a:rPr b="0" sz="1350">
                 <a:solidFill>
                   <a:srgbClr val="64748B"/>
                 </a:solidFill>
@@ -4600,12 +5404,15 @@
           </a:p>
           <a:p>
             <a:pPr>
+              <a:lnSpc>
+                <a:spcPct val="125000"/>
+              </a:lnSpc>
               <a:spcAft>
-                <a:spcPts val="600"/>
+                <a:spcPts val="700"/>
               </a:spcAft>
             </a:pPr>
             <a:r>
-              <a:rPr b="1" sz="1300">
+              <a:rPr b="1" sz="1350">
                 <a:solidFill>
                   <a:srgbClr val="0F172A"/>
                 </a:solidFill>
@@ -4614,7 +5421,7 @@
               <a:t>BME280 SDA ➔ </a:t>
             </a:r>
             <a:r>
-              <a:rPr b="0" sz="1300">
+              <a:rPr b="0" sz="1350">
                 <a:solidFill>
                   <a:srgbClr val="64748B"/>
                 </a:solidFill>
@@ -4625,12 +5432,15 @@
           </a:p>
           <a:p>
             <a:pPr>
+              <a:lnSpc>
+                <a:spcPct val="125000"/>
+              </a:lnSpc>
               <a:spcAft>
-                <a:spcPts val="600"/>
+                <a:spcPts val="700"/>
               </a:spcAft>
             </a:pPr>
             <a:r>
-              <a:rPr b="1" sz="1300">
+              <a:rPr b="1" sz="1350">
                 <a:solidFill>
                   <a:srgbClr val="0F172A"/>
                 </a:solidFill>
@@ -4639,7 +5449,7 @@
               <a:t>OLED SCL / SDA ➔ </a:t>
             </a:r>
             <a:r>
-              <a:rPr b="0" sz="1300">
+              <a:rPr b="0" sz="1350">
                 <a:solidFill>
                   <a:srgbClr val="64748B"/>
                 </a:solidFill>
@@ -4650,12 +5460,15 @@
           </a:p>
           <a:p>
             <a:pPr>
+              <a:lnSpc>
+                <a:spcPct val="125000"/>
+              </a:lnSpc>
               <a:spcAft>
-                <a:spcPts val="600"/>
+                <a:spcPts val="700"/>
               </a:spcAft>
             </a:pPr>
             <a:r>
-              <a:rPr b="1" sz="1300">
+              <a:rPr b="1" sz="1350">
                 <a:solidFill>
                   <a:srgbClr val="0F172A"/>
                 </a:solidFill>
@@ -4664,7 +5477,7 @@
               <a:t>電源供應 ➔ </a:t>
             </a:r>
             <a:r>
-              <a:rPr b="0" sz="1300">
+              <a:rPr b="0" sz="1350">
                 <a:solidFill>
                   <a:srgbClr val="64748B"/>
                 </a:solidFill>
@@ -4675,12 +5488,15 @@
           </a:p>
           <a:p>
             <a:pPr>
+              <a:lnSpc>
+                <a:spcPct val="125000"/>
+              </a:lnSpc>
               <a:spcAft>
-                <a:spcPts val="600"/>
+                <a:spcPts val="700"/>
               </a:spcAft>
             </a:pPr>
             <a:r>
-              <a:rPr b="1" sz="1300">
+              <a:rPr b="1" sz="1350">
                 <a:solidFill>
                   <a:srgbClr val="0F172A"/>
                 </a:solidFill>
@@ -4689,7 +5505,7 @@
               <a:t>成果反饋 ➔ </a:t>
             </a:r>
             <a:r>
-              <a:rPr b="0" sz="1300">
+              <a:rPr b="0" sz="1350">
                 <a:solidFill>
                   <a:srgbClr val="64748B"/>
                 </a:solidFill>
@@ -4705,6 +5521,9 @@
   <p:clrMapOvr>
     <a:masterClrMapping/>
   </p:clrMapOvr>
+  <p:transition spd="med">
+    <p:fade/>
+  </p:transition>
 </p:sld>
 </file>
 
@@ -4727,18 +5546,16 @@
         <p:spPr>
           <a:xfrm>
             <a:off x="0" y="0"/>
-            <a:ext cx="12191695" cy="1005840"/>
+            <a:ext cx="12191695" cy="6858000"/>
           </a:xfrm>
           <a:prstGeom prst="rect">
             <a:avLst/>
           </a:prstGeom>
           <a:solidFill>
-            <a:srgbClr val="0F172A"/>
+            <a:srgbClr val="F8FAFC"/>
           </a:solidFill>
           <a:ln>
-            <a:solidFill>
-              <a:srgbClr val="0F172A"/>
-            </a:solidFill>
+            <a:noFill/>
           </a:ln>
         </p:spPr>
         <p:style>
@@ -4765,14 +5582,100 @@
       </p:sp>
       <p:sp>
         <p:nvSpPr>
-          <p:cNvPr id="3" name="TextBox 2"/>
+          <p:cNvPr id="3" name="Rectangle 2"/>
+          <p:cNvSpPr/>
+          <p:nvPr/>
+        </p:nvSpPr>
+        <p:spPr>
+          <a:xfrm>
+            <a:off x="0" y="0"/>
+            <a:ext cx="12191695" cy="1051560"/>
+          </a:xfrm>
+          <a:prstGeom prst="rect">
+            <a:avLst/>
+          </a:prstGeom>
+          <a:solidFill>
+            <a:srgbClr val="0F172A"/>
+          </a:solidFill>
+          <a:ln>
+            <a:noFill/>
+          </a:ln>
+        </p:spPr>
+        <p:style>
+          <a:lnRef idx="1">
+            <a:schemeClr val="accent1"/>
+          </a:lnRef>
+          <a:fillRef idx="3">
+            <a:schemeClr val="accent1"/>
+          </a:fillRef>
+          <a:effectRef idx="2">
+            <a:schemeClr val="accent1"/>
+          </a:effectRef>
+          <a:fontRef idx="minor">
+            <a:schemeClr val="lt1"/>
+          </a:fontRef>
+        </p:style>
+        <p:txBody>
+          <a:bodyPr rtlCol="0" anchor="ctr"/>
+          <a:lstStyle/>
+          <a:p>
+            <a:pPr algn="ctr"/>
+          </a:p>
+        </p:txBody>
+      </p:sp>
+      <p:sp>
+        <p:nvSpPr>
+          <p:cNvPr id="4" name="Rectangle 3"/>
+          <p:cNvSpPr/>
+          <p:nvPr/>
+        </p:nvSpPr>
+        <p:spPr>
+          <a:xfrm>
+            <a:off x="0" y="1051560"/>
+            <a:ext cx="4114800" cy="45720"/>
+          </a:xfrm>
+          <a:prstGeom prst="rect">
+            <a:avLst/>
+          </a:prstGeom>
+          <a:solidFill>
+            <a:srgbClr val="0284C7"/>
+          </a:solidFill>
+          <a:ln>
+            <a:noFill/>
+          </a:ln>
+        </p:spPr>
+        <p:style>
+          <a:lnRef idx="1">
+            <a:schemeClr val="accent1"/>
+          </a:lnRef>
+          <a:fillRef idx="3">
+            <a:schemeClr val="accent1"/>
+          </a:fillRef>
+          <a:effectRef idx="2">
+            <a:schemeClr val="accent1"/>
+          </a:effectRef>
+          <a:fontRef idx="minor">
+            <a:schemeClr val="lt1"/>
+          </a:fontRef>
+        </p:style>
+        <p:txBody>
+          <a:bodyPr rtlCol="0" anchor="ctr"/>
+          <a:lstStyle/>
+          <a:p>
+            <a:pPr algn="ctr"/>
+          </a:p>
+        </p:txBody>
+      </p:sp>
+      <p:sp>
+        <p:nvSpPr>
+          <p:cNvPr id="5" name="TextBox 4"/>
           <p:cNvSpPr txBox="1"/>
           <p:nvPr/>
         </p:nvSpPr>
         <p:spPr>
           <a:xfrm>
             <a:off x="731520" y="109728"/>
-            <a:ext cx="10698480" cy="274320"/>
+            <a:ext cx="7772400" cy="274320"/>
           </a:xfrm>
           <a:prstGeom prst="rect">
             <a:avLst/>
@@ -4786,7 +5689,7 @@
           <a:lstStyle/>
           <a:p>
             <a:pPr>
-              <a:defRPr sz="1100" b="1">
+              <a:defRPr sz="1150" b="1">
                 <a:solidFill>
                   <a:srgbClr val="0284C7"/>
                 </a:solidFill>
@@ -4794,20 +5697,56 @@
               </a:defRPr>
             </a:pPr>
             <a:r>
-              <a:t>ESP32 ✕ 物聯網 MQTT ✕ 邊緣 AI 實戰</a:t>
-            </a:r>
-          </a:p>
-        </p:txBody>
-      </p:sp>
-      <p:sp>
-        <p:nvSpPr>
-          <p:cNvPr id="4" name="TextBox 3"/>
+              <a:t>📡 ESP32 ✕ 物聯網 MQTT ✕ 邊緣 AI 實戰</a:t>
+            </a:r>
+          </a:p>
+        </p:txBody>
+      </p:sp>
+      <p:sp>
+        <p:nvSpPr>
+          <p:cNvPr id="6" name="TextBox 5"/>
           <p:cNvSpPr txBox="1"/>
           <p:nvPr/>
         </p:nvSpPr>
         <p:spPr>
           <a:xfrm>
-            <a:off x="731520" y="320040"/>
+            <a:off x="9144000" y="109728"/>
+            <a:ext cx="2286000" cy="274320"/>
+          </a:xfrm>
+          <a:prstGeom prst="rect">
+            <a:avLst/>
+          </a:prstGeom>
+          <a:noFill/>
+        </p:spPr>
+        <p:txBody>
+          <a:bodyPr wrap="none">
+            <a:spAutoFit/>
+          </a:bodyPr>
+          <a:lstStyle/>
+          <a:p>
+            <a:pPr algn="r">
+              <a:defRPr sz="1200" b="1">
+                <a:solidFill>
+                  <a:srgbClr val="B4C8E1"/>
+                </a:solidFill>
+                <a:latin typeface="微軟正黑體"/>
+              </a:defRPr>
+            </a:pPr>
+            <a:r>
+              <a:t>第 04 / 11 頁</a:t>
+            </a:r>
+          </a:p>
+        </p:txBody>
+      </p:sp>
+      <p:sp>
+        <p:nvSpPr>
+          <p:cNvPr id="7" name="TextBox 6"/>
+          <p:cNvSpPr txBox="1"/>
+          <p:nvPr/>
+        </p:nvSpPr>
+        <p:spPr>
+          <a:xfrm>
+            <a:off x="731520" y="365760"/>
             <a:ext cx="10698480" cy="594360"/>
           </a:xfrm>
           <a:prstGeom prst="rect">
@@ -4822,7 +5761,7 @@
           <a:lstStyle/>
           <a:p>
             <a:pPr>
-              <a:defRPr sz="2200" b="1">
+              <a:defRPr sz="2400" b="1">
                 <a:solidFill>
                   <a:srgbClr val="FFFFFF"/>
                 </a:solidFill>
@@ -4837,14 +5776,50 @@
       </p:sp>
       <p:sp>
         <p:nvSpPr>
-          <p:cNvPr id="5" name="Rounded Rectangle 4"/>
+          <p:cNvPr id="8" name="TextBox 7"/>
+          <p:cNvSpPr txBox="1"/>
+          <p:nvPr/>
+        </p:nvSpPr>
+        <p:spPr>
+          <a:xfrm>
+            <a:off x="731520" y="6510528"/>
+            <a:ext cx="10698480" cy="274320"/>
+          </a:xfrm>
+          <a:prstGeom prst="rect">
+            <a:avLst/>
+          </a:prstGeom>
+          <a:noFill/>
+        </p:spPr>
+        <p:txBody>
+          <a:bodyPr wrap="none">
+            <a:spAutoFit/>
+          </a:bodyPr>
+          <a:lstStyle/>
+          <a:p>
+            <a:pPr>
+              <a:defRPr sz="1050">
+                <a:solidFill>
+                  <a:srgbClr val="64748B"/>
+                </a:solidFill>
+                <a:latin typeface="微軟正黑體"/>
+              </a:defRPr>
+            </a:pPr>
+            <a:r>
+              <a:t>🌐 互動課程網頁：https://stjedu.github.io/www/esp32_mqtt_course.html   |   主講：簡樹桐 老師</a:t>
+            </a:r>
+          </a:p>
+        </p:txBody>
+      </p:sp>
+      <p:sp>
+        <p:nvSpPr>
+          <p:cNvPr id="9" name="Rounded Rectangle 8"/>
           <p:cNvSpPr/>
           <p:nvPr/>
         </p:nvSpPr>
         <p:spPr>
           <a:xfrm>
-            <a:off x="731520" y="1371600"/>
-            <a:ext cx="10698480" cy="2377440"/>
+            <a:off x="731520" y="1325880"/>
+            <a:ext cx="10698480" cy="2423160"/>
           </a:xfrm>
           <a:prstGeom prst="roundRect">
             <a:avLst/>
@@ -4882,14 +5857,14 @@
       </p:sp>
       <p:sp>
         <p:nvSpPr>
-          <p:cNvPr id="6" name="TextBox 5"/>
+          <p:cNvPr id="10" name="TextBox 9"/>
           <p:cNvSpPr txBox="1"/>
           <p:nvPr/>
         </p:nvSpPr>
         <p:spPr>
           <a:xfrm>
-            <a:off x="960120" y="1536192"/>
-            <a:ext cx="10241280" cy="2048256"/>
+            <a:off x="960120" y="1472184"/>
+            <a:ext cx="10241280" cy="2130552"/>
           </a:xfrm>
           <a:prstGeom prst="rect">
             <a:avLst/>
@@ -4904,7 +5879,7 @@
           <a:p>
             <a:pPr>
               <a:spcAft>
-                <a:spcPts val="800"/>
+                <a:spcPts val="600"/>
               </a:spcAft>
               <a:defRPr sz="1500" b="1">
                 <a:solidFill>
@@ -4914,17 +5889,20 @@
               </a:defRPr>
             </a:pPr>
             <a:r>
-              <a:t>💡 實戰提示詞 (Prompt)：陌生感測器快速探索與引導 Prompt</a:t>
-            </a:r>
-          </a:p>
-          <a:p>
-            <a:pPr>
+              <a:t>💡 實戰提示詞 (Prompt)：陌生感測器快速探索與引導 Prompt   [可直接反白複製]</a:t>
+            </a:r>
+          </a:p>
+          <a:p>
+            <a:pPr>
+              <a:lnSpc>
+                <a:spcPct val="120000"/>
+              </a:lnSpc>
               <a:spcAft>
-                <a:spcPts val="800"/>
+                <a:spcPts val="600"/>
               </a:spcAft>
             </a:pPr>
             <a:r>
-              <a:rPr sz="1200">
+              <a:rPr sz="1250">
                 <a:solidFill>
                   <a:srgbClr val="1E293B"/>
                 </a:solidFill>
@@ -4939,9 +5917,9 @@
           </a:p>
           <a:p>
             <a:r>
-              <a:rPr sz="1100" i="1">
-                <a:solidFill>
-                  <a:srgbClr val="64748B"/>
+              <a:rPr sz="1150" b="1">
+                <a:solidFill>
+                  <a:srgbClr val="0284C7"/>
                 </a:solidFill>
                 <a:latin typeface="微軟正黑體"/>
               </a:rPr>
@@ -4952,14 +5930,14 @@
       </p:sp>
       <p:sp>
         <p:nvSpPr>
-          <p:cNvPr id="7" name="Rounded Rectangle 6"/>
+          <p:cNvPr id="11" name="Rounded Rectangle 10"/>
           <p:cNvSpPr/>
           <p:nvPr/>
         </p:nvSpPr>
         <p:spPr>
           <a:xfrm>
-            <a:off x="731520" y="4023360"/>
-            <a:ext cx="10698480" cy="2377440"/>
+            <a:off x="731520" y="3931920"/>
+            <a:ext cx="10698480" cy="2423160"/>
           </a:xfrm>
           <a:prstGeom prst="roundRect">
             <a:avLst/>
@@ -4997,14 +5975,14 @@
       </p:sp>
       <p:sp>
         <p:nvSpPr>
-          <p:cNvPr id="8" name="TextBox 7"/>
+          <p:cNvPr id="12" name="TextBox 11"/>
           <p:cNvSpPr txBox="1"/>
           <p:nvPr/>
         </p:nvSpPr>
         <p:spPr>
           <a:xfrm>
-            <a:off x="960120" y="4187952"/>
-            <a:ext cx="10241280" cy="2048256"/>
+            <a:off x="960120" y="4078224"/>
+            <a:ext cx="10241280" cy="2130552"/>
           </a:xfrm>
           <a:prstGeom prst="rect">
             <a:avLst/>
@@ -5019,7 +5997,7 @@
           <a:p>
             <a:pPr>
               <a:spcAft>
-                <a:spcPts val="800"/>
+                <a:spcPts val="600"/>
               </a:spcAft>
               <a:defRPr sz="1500" b="1">
                 <a:solidFill>
@@ -5029,17 +6007,20 @@
               </a:defRPr>
             </a:pPr>
             <a:r>
-              <a:t>💡 實戰提示詞 (Prompt)：BME280 數值讀取並即時顯示於 OLED 螢幕</a:t>
-            </a:r>
-          </a:p>
-          <a:p>
-            <a:pPr>
+              <a:t>💡 實戰提示詞 (Prompt)：BME280 數值讀取並即時顯示於 OLED 螢幕   [可直接反白複製]</a:t>
+            </a:r>
+          </a:p>
+          <a:p>
+            <a:pPr>
+              <a:lnSpc>
+                <a:spcPct val="120000"/>
+              </a:lnSpc>
               <a:spcAft>
-                <a:spcPts val="800"/>
+                <a:spcPts val="600"/>
               </a:spcAft>
             </a:pPr>
             <a:r>
-              <a:rPr sz="1200">
+              <a:rPr sz="1250">
                 <a:solidFill>
                   <a:srgbClr val="1E293B"/>
                 </a:solidFill>
@@ -5056,9 +6037,9 @@
           </a:p>
           <a:p>
             <a:r>
-              <a:rPr sz="1100" i="1">
-                <a:solidFill>
-                  <a:srgbClr val="64748B"/>
+              <a:rPr sz="1150" b="1">
+                <a:solidFill>
+                  <a:srgbClr val="0284C7"/>
                 </a:solidFill>
                 <a:latin typeface="微軟正黑體"/>
               </a:rPr>
@@ -5072,6 +6053,9 @@
   <p:clrMapOvr>
     <a:masterClrMapping/>
   </p:clrMapOvr>
+  <p:transition spd="med">
+    <p:fade/>
+  </p:transition>
 </p:sld>
 </file>
 
@@ -5094,18 +6078,16 @@
         <p:spPr>
           <a:xfrm>
             <a:off x="0" y="0"/>
-            <a:ext cx="12191695" cy="1005840"/>
+            <a:ext cx="12191695" cy="6858000"/>
           </a:xfrm>
           <a:prstGeom prst="rect">
             <a:avLst/>
           </a:prstGeom>
           <a:solidFill>
-            <a:srgbClr val="0F172A"/>
+            <a:srgbClr val="F8FAFC"/>
           </a:solidFill>
           <a:ln>
-            <a:solidFill>
-              <a:srgbClr val="0F172A"/>
-            </a:solidFill>
+            <a:noFill/>
           </a:ln>
         </p:spPr>
         <p:style>
@@ -5132,14 +6114,100 @@
       </p:sp>
       <p:sp>
         <p:nvSpPr>
-          <p:cNvPr id="3" name="TextBox 2"/>
+          <p:cNvPr id="3" name="Rectangle 2"/>
+          <p:cNvSpPr/>
+          <p:nvPr/>
+        </p:nvSpPr>
+        <p:spPr>
+          <a:xfrm>
+            <a:off x="0" y="0"/>
+            <a:ext cx="12191695" cy="1051560"/>
+          </a:xfrm>
+          <a:prstGeom prst="rect">
+            <a:avLst/>
+          </a:prstGeom>
+          <a:solidFill>
+            <a:srgbClr val="0F172A"/>
+          </a:solidFill>
+          <a:ln>
+            <a:noFill/>
+          </a:ln>
+        </p:spPr>
+        <p:style>
+          <a:lnRef idx="1">
+            <a:schemeClr val="accent1"/>
+          </a:lnRef>
+          <a:fillRef idx="3">
+            <a:schemeClr val="accent1"/>
+          </a:fillRef>
+          <a:effectRef idx="2">
+            <a:schemeClr val="accent1"/>
+          </a:effectRef>
+          <a:fontRef idx="minor">
+            <a:schemeClr val="lt1"/>
+          </a:fontRef>
+        </p:style>
+        <p:txBody>
+          <a:bodyPr rtlCol="0" anchor="ctr"/>
+          <a:lstStyle/>
+          <a:p>
+            <a:pPr algn="ctr"/>
+          </a:p>
+        </p:txBody>
+      </p:sp>
+      <p:sp>
+        <p:nvSpPr>
+          <p:cNvPr id="4" name="Rectangle 3"/>
+          <p:cNvSpPr/>
+          <p:nvPr/>
+        </p:nvSpPr>
+        <p:spPr>
+          <a:xfrm>
+            <a:off x="0" y="1051560"/>
+            <a:ext cx="4114800" cy="45720"/>
+          </a:xfrm>
+          <a:prstGeom prst="rect">
+            <a:avLst/>
+          </a:prstGeom>
+          <a:solidFill>
+            <a:srgbClr val="0284C7"/>
+          </a:solidFill>
+          <a:ln>
+            <a:noFill/>
+          </a:ln>
+        </p:spPr>
+        <p:style>
+          <a:lnRef idx="1">
+            <a:schemeClr val="accent1"/>
+          </a:lnRef>
+          <a:fillRef idx="3">
+            <a:schemeClr val="accent1"/>
+          </a:fillRef>
+          <a:effectRef idx="2">
+            <a:schemeClr val="accent1"/>
+          </a:effectRef>
+          <a:fontRef idx="minor">
+            <a:schemeClr val="lt1"/>
+          </a:fontRef>
+        </p:style>
+        <p:txBody>
+          <a:bodyPr rtlCol="0" anchor="ctr"/>
+          <a:lstStyle/>
+          <a:p>
+            <a:pPr algn="ctr"/>
+          </a:p>
+        </p:txBody>
+      </p:sp>
+      <p:sp>
+        <p:nvSpPr>
+          <p:cNvPr id="5" name="TextBox 4"/>
           <p:cNvSpPr txBox="1"/>
           <p:nvPr/>
         </p:nvSpPr>
         <p:spPr>
           <a:xfrm>
             <a:off x="731520" y="109728"/>
-            <a:ext cx="10698480" cy="274320"/>
+            <a:ext cx="7772400" cy="274320"/>
           </a:xfrm>
           <a:prstGeom prst="rect">
             <a:avLst/>
@@ -5153,7 +6221,7 @@
           <a:lstStyle/>
           <a:p>
             <a:pPr>
-              <a:defRPr sz="1100" b="1">
+              <a:defRPr sz="1150" b="1">
                 <a:solidFill>
                   <a:srgbClr val="0284C7"/>
                 </a:solidFill>
@@ -5161,20 +6229,56 @@
               </a:defRPr>
             </a:pPr>
             <a:r>
-              <a:t>ESP32 ✕ 物聯網 MQTT ✕ 邊緣 AI 實戰</a:t>
-            </a:r>
-          </a:p>
-        </p:txBody>
-      </p:sp>
-      <p:sp>
-        <p:nvSpPr>
-          <p:cNvPr id="4" name="TextBox 3"/>
+              <a:t>📡 ESP32 ✕ 物聯網 MQTT ✕ 邊緣 AI 實戰</a:t>
+            </a:r>
+          </a:p>
+        </p:txBody>
+      </p:sp>
+      <p:sp>
+        <p:nvSpPr>
+          <p:cNvPr id="6" name="TextBox 5"/>
           <p:cNvSpPr txBox="1"/>
           <p:nvPr/>
         </p:nvSpPr>
         <p:spPr>
           <a:xfrm>
-            <a:off x="731520" y="320040"/>
+            <a:off x="9144000" y="109728"/>
+            <a:ext cx="2286000" cy="274320"/>
+          </a:xfrm>
+          <a:prstGeom prst="rect">
+            <a:avLst/>
+          </a:prstGeom>
+          <a:noFill/>
+        </p:spPr>
+        <p:txBody>
+          <a:bodyPr wrap="none">
+            <a:spAutoFit/>
+          </a:bodyPr>
+          <a:lstStyle/>
+          <a:p>
+            <a:pPr algn="r">
+              <a:defRPr sz="1200" b="1">
+                <a:solidFill>
+                  <a:srgbClr val="B4C8E1"/>
+                </a:solidFill>
+                <a:latin typeface="微軟正黑體"/>
+              </a:defRPr>
+            </a:pPr>
+            <a:r>
+              <a:t>第 05 / 11 頁</a:t>
+            </a:r>
+          </a:p>
+        </p:txBody>
+      </p:sp>
+      <p:sp>
+        <p:nvSpPr>
+          <p:cNvPr id="7" name="TextBox 6"/>
+          <p:cNvSpPr txBox="1"/>
+          <p:nvPr/>
+        </p:nvSpPr>
+        <p:spPr>
+          <a:xfrm>
+            <a:off x="731520" y="365760"/>
             <a:ext cx="10698480" cy="594360"/>
           </a:xfrm>
           <a:prstGeom prst="rect">
@@ -5189,7 +6293,7 @@
           <a:lstStyle/>
           <a:p>
             <a:pPr>
-              <a:defRPr sz="2200" b="1">
+              <a:defRPr sz="2400" b="1">
                 <a:solidFill>
                   <a:srgbClr val="FFFFFF"/>
                 </a:solidFill>
@@ -5204,14 +6308,50 @@
       </p:sp>
       <p:sp>
         <p:nvSpPr>
-          <p:cNvPr id="5" name="Rounded Rectangle 4"/>
+          <p:cNvPr id="8" name="TextBox 7"/>
+          <p:cNvSpPr txBox="1"/>
+          <p:nvPr/>
+        </p:nvSpPr>
+        <p:spPr>
+          <a:xfrm>
+            <a:off x="731520" y="6510528"/>
+            <a:ext cx="10698480" cy="274320"/>
+          </a:xfrm>
+          <a:prstGeom prst="rect">
+            <a:avLst/>
+          </a:prstGeom>
+          <a:noFill/>
+        </p:spPr>
+        <p:txBody>
+          <a:bodyPr wrap="none">
+            <a:spAutoFit/>
+          </a:bodyPr>
+          <a:lstStyle/>
+          <a:p>
+            <a:pPr>
+              <a:defRPr sz="1050">
+                <a:solidFill>
+                  <a:srgbClr val="64748B"/>
+                </a:solidFill>
+                <a:latin typeface="微軟正黑體"/>
+              </a:defRPr>
+            </a:pPr>
+            <a:r>
+              <a:t>🌐 互動課程網頁：https://stjedu.github.io/www/esp32_mqtt_course.html   |   主講：簡樹桐 老師</a:t>
+            </a:r>
+          </a:p>
+        </p:txBody>
+      </p:sp>
+      <p:sp>
+        <p:nvSpPr>
+          <p:cNvPr id="9" name="Rounded Rectangle 8"/>
           <p:cNvSpPr/>
           <p:nvPr/>
         </p:nvSpPr>
         <p:spPr>
           <a:xfrm>
-            <a:off x="731520" y="1371600"/>
-            <a:ext cx="5120640" cy="4937760"/>
+            <a:off x="731520" y="1325880"/>
+            <a:ext cx="5120640" cy="4983480"/>
           </a:xfrm>
           <a:prstGeom prst="roundRect">
             <a:avLst/>
@@ -5249,14 +6389,57 @@
       </p:sp>
       <p:sp>
         <p:nvSpPr>
-          <p:cNvPr id="6" name="TextBox 5"/>
+          <p:cNvPr id="10" name="Rounded Rectangle 9"/>
+          <p:cNvSpPr/>
+          <p:nvPr/>
+        </p:nvSpPr>
+        <p:spPr>
+          <a:xfrm>
+            <a:off x="731520" y="1325880"/>
+            <a:ext cx="5120640" cy="91440"/>
+          </a:xfrm>
+          <a:prstGeom prst="roundRect">
+            <a:avLst/>
+          </a:prstGeom>
+          <a:solidFill>
+            <a:srgbClr val="0284C7"/>
+          </a:solidFill>
+          <a:ln>
+            <a:noFill/>
+          </a:ln>
+        </p:spPr>
+        <p:style>
+          <a:lnRef idx="1">
+            <a:schemeClr val="accent1"/>
+          </a:lnRef>
+          <a:fillRef idx="3">
+            <a:schemeClr val="accent1"/>
+          </a:fillRef>
+          <a:effectRef idx="2">
+            <a:schemeClr val="accent1"/>
+          </a:effectRef>
+          <a:fontRef idx="minor">
+            <a:schemeClr val="lt1"/>
+          </a:fontRef>
+        </p:style>
+        <p:txBody>
+          <a:bodyPr rtlCol="0" anchor="ctr"/>
+          <a:lstStyle/>
+          <a:p>
+            <a:pPr algn="ctr"/>
+          </a:p>
+        </p:txBody>
+      </p:sp>
+      <p:sp>
+        <p:nvSpPr>
+          <p:cNvPr id="11" name="TextBox 10"/>
           <p:cNvSpPr txBox="1"/>
           <p:nvPr/>
         </p:nvSpPr>
         <p:spPr>
           <a:xfrm>
-            <a:off x="914400" y="1508760"/>
-            <a:ext cx="4754880" cy="4663440"/>
+            <a:off x="960120" y="1508760"/>
+            <a:ext cx="4663440" cy="4663440"/>
           </a:xfrm>
           <a:prstGeom prst="rect">
             <a:avLst/>
@@ -5273,7 +6456,7 @@
               <a:spcAft>
                 <a:spcPts val="1000"/>
               </a:spcAft>
-              <a:defRPr sz="1600" b="1">
+              <a:defRPr sz="1750" b="1">
                 <a:solidFill>
                   <a:srgbClr val="0F172A"/>
                 </a:solidFill>
@@ -5286,12 +6469,15 @@
           </a:p>
           <a:p>
             <a:pPr>
+              <a:lnSpc>
+                <a:spcPct val="125000"/>
+              </a:lnSpc>
               <a:spcAft>
-                <a:spcPts val="600"/>
+                <a:spcPts val="700"/>
               </a:spcAft>
             </a:pPr>
             <a:r>
-              <a:rPr b="1" sz="1300">
+              <a:rPr b="1" sz="1350">
                 <a:solidFill>
                   <a:srgbClr val="0F172A"/>
                 </a:solidFill>
@@ -5300,7 +6486,7 @@
               <a:t>按鈕低電位動作 (Active Low)： </a:t>
             </a:r>
             <a:r>
-              <a:rPr b="0" sz="1300">
+              <a:rPr b="0" sz="1350">
                 <a:solidFill>
                   <a:srgbClr val="64748B"/>
                 </a:solidFill>
@@ -5311,12 +6497,15 @@
           </a:p>
           <a:p>
             <a:pPr>
+              <a:lnSpc>
+                <a:spcPct val="125000"/>
+              </a:lnSpc>
               <a:spcAft>
-                <a:spcPts val="600"/>
+                <a:spcPts val="700"/>
               </a:spcAft>
             </a:pPr>
             <a:r>
-              <a:rPr b="1" sz="1300">
+              <a:rPr b="1" sz="1350">
                 <a:solidFill>
                   <a:srgbClr val="0F172A"/>
                 </a:solidFill>
@@ -5325,7 +6514,7 @@
               <a:t>四按鈕腳位分配： </a:t>
             </a:r>
             <a:r>
-              <a:rPr b="0" sz="1300">
+              <a:rPr b="0" sz="1350">
                 <a:solidFill>
                   <a:srgbClr val="64748B"/>
                 </a:solidFill>
@@ -5336,12 +6525,15 @@
           </a:p>
           <a:p>
             <a:pPr>
+              <a:lnSpc>
+                <a:spcPct val="125000"/>
+              </a:lnSpc>
               <a:spcAft>
-                <a:spcPts val="600"/>
+                <a:spcPts val="700"/>
               </a:spcAft>
             </a:pPr>
             <a:r>
-              <a:rPr b="1" sz="1300">
+              <a:rPr b="1" sz="1350">
                 <a:solidFill>
                   <a:srgbClr val="0F172A"/>
                 </a:solidFill>
@@ -5350,7 +6542,7 @@
               <a:t>按鈕功能定義： </a:t>
             </a:r>
             <a:r>
-              <a:rPr b="0" sz="1300">
+              <a:rPr b="0" sz="1350">
                 <a:solidFill>
                   <a:srgbClr val="64748B"/>
                 </a:solidFill>
@@ -5361,12 +6553,15 @@
           </a:p>
           <a:p>
             <a:pPr>
+              <a:lnSpc>
+                <a:spcPct val="125000"/>
+              </a:lnSpc>
               <a:spcAft>
-                <a:spcPts val="600"/>
+                <a:spcPts val="700"/>
               </a:spcAft>
             </a:pPr>
             <a:r>
-              <a:rPr b="1" sz="1300">
+              <a:rPr b="1" sz="1350">
                 <a:solidFill>
                   <a:srgbClr val="0F172A"/>
                 </a:solidFill>
@@ -5375,7 +6570,7 @@
               <a:t>OLED 即時刷新： </a:t>
             </a:r>
             <a:r>
-              <a:rPr b="0" sz="1300">
+              <a:rPr b="0" sz="1350">
                 <a:solidFill>
                   <a:srgbClr val="64748B"/>
                 </a:solidFill>
@@ -5388,14 +6583,14 @@
       </p:sp>
       <p:sp>
         <p:nvSpPr>
-          <p:cNvPr id="7" name="Rounded Rectangle 6"/>
+          <p:cNvPr id="12" name="Rounded Rectangle 11"/>
           <p:cNvSpPr/>
           <p:nvPr/>
         </p:nvSpPr>
         <p:spPr>
           <a:xfrm>
-            <a:off x="6309360" y="1371600"/>
-            <a:ext cx="5120640" cy="4937760"/>
+            <a:off x="6309360" y="1325880"/>
+            <a:ext cx="5120640" cy="4983480"/>
           </a:xfrm>
           <a:prstGeom prst="roundRect">
             <a:avLst/>
@@ -5433,14 +6628,57 @@
       </p:sp>
       <p:sp>
         <p:nvSpPr>
-          <p:cNvPr id="8" name="TextBox 7"/>
+          <p:cNvPr id="13" name="Rounded Rectangle 12"/>
+          <p:cNvSpPr/>
+          <p:nvPr/>
+        </p:nvSpPr>
+        <p:spPr>
+          <a:xfrm>
+            <a:off x="6309360" y="1325880"/>
+            <a:ext cx="5120640" cy="91440"/>
+          </a:xfrm>
+          <a:prstGeom prst="roundRect">
+            <a:avLst/>
+          </a:prstGeom>
+          <a:solidFill>
+            <a:srgbClr val="D97706"/>
+          </a:solidFill>
+          <a:ln>
+            <a:noFill/>
+          </a:ln>
+        </p:spPr>
+        <p:style>
+          <a:lnRef idx="1">
+            <a:schemeClr val="accent1"/>
+          </a:lnRef>
+          <a:fillRef idx="3">
+            <a:schemeClr val="accent1"/>
+          </a:fillRef>
+          <a:effectRef idx="2">
+            <a:schemeClr val="accent1"/>
+          </a:effectRef>
+          <a:fontRef idx="minor">
+            <a:schemeClr val="lt1"/>
+          </a:fontRef>
+        </p:style>
+        <p:txBody>
+          <a:bodyPr rtlCol="0" anchor="ctr"/>
+          <a:lstStyle/>
+          <a:p>
+            <a:pPr algn="ctr"/>
+          </a:p>
+        </p:txBody>
+      </p:sp>
+      <p:sp>
+        <p:nvSpPr>
+          <p:cNvPr id="14" name="TextBox 13"/>
           <p:cNvSpPr txBox="1"/>
           <p:nvPr/>
         </p:nvSpPr>
         <p:spPr>
           <a:xfrm>
-            <a:off x="6492240" y="1508760"/>
-            <a:ext cx="4754880" cy="4663440"/>
+            <a:off x="6537960" y="1508760"/>
+            <a:ext cx="4663440" cy="4663440"/>
           </a:xfrm>
           <a:prstGeom prst="rect">
             <a:avLst/>
@@ -5457,7 +6695,7 @@
               <a:spcAft>
                 <a:spcPts val="1000"/>
               </a:spcAft>
-              <a:defRPr sz="1600" b="1">
+              <a:defRPr sz="1750" b="1">
                 <a:solidFill>
                   <a:srgbClr val="0F172A"/>
                 </a:solidFill>
@@ -5470,12 +6708,15 @@
           </a:p>
           <a:p>
             <a:pPr>
+              <a:lnSpc>
+                <a:spcPct val="125000"/>
+              </a:lnSpc>
               <a:spcAft>
-                <a:spcPts val="600"/>
+                <a:spcPts val="700"/>
               </a:spcAft>
             </a:pPr>
             <a:r>
-              <a:rPr b="1" sz="1300">
+              <a:rPr b="1" sz="1350">
                 <a:solidFill>
                   <a:srgbClr val="0F172A"/>
                 </a:solidFill>
@@ -5484,7 +6725,7 @@
               <a:t>Broker 伺服器： </a:t>
             </a:r>
             <a:r>
-              <a:rPr b="0" sz="1300">
+              <a:rPr b="0" sz="1350">
                 <a:solidFill>
                   <a:srgbClr val="64748B"/>
                 </a:solidFill>
@@ -5495,12 +6736,15 @@
           </a:p>
           <a:p>
             <a:pPr>
+              <a:lnSpc>
+                <a:spcPct val="125000"/>
+              </a:lnSpc>
               <a:spcAft>
-                <a:spcPts val="600"/>
+                <a:spcPts val="700"/>
               </a:spcAft>
             </a:pPr>
             <a:r>
-              <a:rPr b="1" sz="1300">
+              <a:rPr b="1" sz="1350">
                 <a:solidFill>
                   <a:srgbClr val="0F172A"/>
                 </a:solidFill>
@@ -5509,7 +6753,7 @@
               <a:t>通訊埠 (Port)： </a:t>
             </a:r>
             <a:r>
-              <a:rPr b="0" sz="1300">
+              <a:rPr b="0" sz="1350">
                 <a:solidFill>
                   <a:srgbClr val="64748B"/>
                 </a:solidFill>
@@ -5520,12 +6764,15 @@
           </a:p>
           <a:p>
             <a:pPr>
+              <a:lnSpc>
+                <a:spcPct val="125000"/>
+              </a:lnSpc>
               <a:spcAft>
-                <a:spcPts val="600"/>
+                <a:spcPts val="700"/>
               </a:spcAft>
             </a:pPr>
             <a:r>
-              <a:rPr b="1" sz="1300">
+              <a:rPr b="1" sz="1350">
                 <a:solidFill>
                   <a:srgbClr val="0F172A"/>
                 </a:solidFill>
@@ -5534,7 +6781,7 @@
               <a:t>Client ID 與 Topic： </a:t>
             </a:r>
             <a:r>
-              <a:rPr b="0" sz="1300">
+              <a:rPr b="0" sz="1350">
                 <a:solidFill>
                   <a:srgbClr val="64748B"/>
                 </a:solidFill>
@@ -5545,12 +6792,15 @@
           </a:p>
           <a:p>
             <a:pPr>
+              <a:lnSpc>
+                <a:spcPct val="125000"/>
+              </a:lnSpc>
               <a:spcAft>
-                <a:spcPts val="600"/>
+                <a:spcPts val="700"/>
               </a:spcAft>
             </a:pPr>
             <a:r>
-              <a:rPr b="1" sz="1300">
+              <a:rPr b="1" sz="1350">
                 <a:solidFill>
                   <a:srgbClr val="0F172A"/>
                 </a:solidFill>
@@ -5559,13 +6809,13 @@
               <a:t>手機 App 配對： </a:t>
             </a:r>
             <a:r>
-              <a:rPr b="0" sz="1300">
+              <a:rPr b="0" sz="1350">
                 <a:solidFill>
                   <a:srgbClr val="64748B"/>
                 </a:solidFill>
                 <a:latin typeface="微軟正黑體"/>
               </a:rPr>
-              <a:t>安裝 **IoT MQTT Panel** App，建立按鈕發布開關指令，並訂閱 ESP32 傳回的計時或狀態訊息。</a:t>
+              <a:t>安裝 IoT MQTT Panel App，建立按鈕發布開關指令，並訂閱 ESP32 傳回的計時或狀態訊息。</a:t>
             </a:r>
           </a:p>
         </p:txBody>
@@ -5575,6 +6825,9 @@
   <p:clrMapOvr>
     <a:masterClrMapping/>
   </p:clrMapOvr>
+  <p:transition spd="med">
+    <p:fade/>
+  </p:transition>
 </p:sld>
 </file>
 
@@ -5597,18 +6850,16 @@
         <p:spPr>
           <a:xfrm>
             <a:off x="0" y="0"/>
-            <a:ext cx="12191695" cy="1005840"/>
+            <a:ext cx="12191695" cy="6858000"/>
           </a:xfrm>
           <a:prstGeom prst="rect">
             <a:avLst/>
           </a:prstGeom>
           <a:solidFill>
-            <a:srgbClr val="0F172A"/>
+            <a:srgbClr val="F8FAFC"/>
           </a:solidFill>
           <a:ln>
-            <a:solidFill>
-              <a:srgbClr val="0F172A"/>
-            </a:solidFill>
+            <a:noFill/>
           </a:ln>
         </p:spPr>
         <p:style>
@@ -5635,14 +6886,100 @@
       </p:sp>
       <p:sp>
         <p:nvSpPr>
-          <p:cNvPr id="3" name="TextBox 2"/>
+          <p:cNvPr id="3" name="Rectangle 2"/>
+          <p:cNvSpPr/>
+          <p:nvPr/>
+        </p:nvSpPr>
+        <p:spPr>
+          <a:xfrm>
+            <a:off x="0" y="0"/>
+            <a:ext cx="12191695" cy="1051560"/>
+          </a:xfrm>
+          <a:prstGeom prst="rect">
+            <a:avLst/>
+          </a:prstGeom>
+          <a:solidFill>
+            <a:srgbClr val="0F172A"/>
+          </a:solidFill>
+          <a:ln>
+            <a:noFill/>
+          </a:ln>
+        </p:spPr>
+        <p:style>
+          <a:lnRef idx="1">
+            <a:schemeClr val="accent1"/>
+          </a:lnRef>
+          <a:fillRef idx="3">
+            <a:schemeClr val="accent1"/>
+          </a:fillRef>
+          <a:effectRef idx="2">
+            <a:schemeClr val="accent1"/>
+          </a:effectRef>
+          <a:fontRef idx="minor">
+            <a:schemeClr val="lt1"/>
+          </a:fontRef>
+        </p:style>
+        <p:txBody>
+          <a:bodyPr rtlCol="0" anchor="ctr"/>
+          <a:lstStyle/>
+          <a:p>
+            <a:pPr algn="ctr"/>
+          </a:p>
+        </p:txBody>
+      </p:sp>
+      <p:sp>
+        <p:nvSpPr>
+          <p:cNvPr id="4" name="Rectangle 3"/>
+          <p:cNvSpPr/>
+          <p:nvPr/>
+        </p:nvSpPr>
+        <p:spPr>
+          <a:xfrm>
+            <a:off x="0" y="1051560"/>
+            <a:ext cx="4114800" cy="45720"/>
+          </a:xfrm>
+          <a:prstGeom prst="rect">
+            <a:avLst/>
+          </a:prstGeom>
+          <a:solidFill>
+            <a:srgbClr val="0284C7"/>
+          </a:solidFill>
+          <a:ln>
+            <a:noFill/>
+          </a:ln>
+        </p:spPr>
+        <p:style>
+          <a:lnRef idx="1">
+            <a:schemeClr val="accent1"/>
+          </a:lnRef>
+          <a:fillRef idx="3">
+            <a:schemeClr val="accent1"/>
+          </a:fillRef>
+          <a:effectRef idx="2">
+            <a:schemeClr val="accent1"/>
+          </a:effectRef>
+          <a:fontRef idx="minor">
+            <a:schemeClr val="lt1"/>
+          </a:fontRef>
+        </p:style>
+        <p:txBody>
+          <a:bodyPr rtlCol="0" anchor="ctr"/>
+          <a:lstStyle/>
+          <a:p>
+            <a:pPr algn="ctr"/>
+          </a:p>
+        </p:txBody>
+      </p:sp>
+      <p:sp>
+        <p:nvSpPr>
+          <p:cNvPr id="5" name="TextBox 4"/>
           <p:cNvSpPr txBox="1"/>
           <p:nvPr/>
         </p:nvSpPr>
         <p:spPr>
           <a:xfrm>
             <a:off x="731520" y="109728"/>
-            <a:ext cx="10698480" cy="274320"/>
+            <a:ext cx="7772400" cy="274320"/>
           </a:xfrm>
           <a:prstGeom prst="rect">
             <a:avLst/>
@@ -5656,7 +6993,7 @@
           <a:lstStyle/>
           <a:p>
             <a:pPr>
-              <a:defRPr sz="1100" b="1">
+              <a:defRPr sz="1150" b="1">
                 <a:solidFill>
                   <a:srgbClr val="0284C7"/>
                 </a:solidFill>
@@ -5664,20 +7001,56 @@
               </a:defRPr>
             </a:pPr>
             <a:r>
-              <a:t>ESP32 ✕ 物聯網 MQTT ✕ 邊緣 AI 實戰</a:t>
-            </a:r>
-          </a:p>
-        </p:txBody>
-      </p:sp>
-      <p:sp>
-        <p:nvSpPr>
-          <p:cNvPr id="4" name="TextBox 3"/>
+              <a:t>📡 ESP32 ✕ 物聯網 MQTT ✕ 邊緣 AI 實戰</a:t>
+            </a:r>
+          </a:p>
+        </p:txBody>
+      </p:sp>
+      <p:sp>
+        <p:nvSpPr>
+          <p:cNvPr id="6" name="TextBox 5"/>
           <p:cNvSpPr txBox="1"/>
           <p:nvPr/>
         </p:nvSpPr>
         <p:spPr>
           <a:xfrm>
-            <a:off x="731520" y="320040"/>
+            <a:off x="9144000" y="109728"/>
+            <a:ext cx="2286000" cy="274320"/>
+          </a:xfrm>
+          <a:prstGeom prst="rect">
+            <a:avLst/>
+          </a:prstGeom>
+          <a:noFill/>
+        </p:spPr>
+        <p:txBody>
+          <a:bodyPr wrap="none">
+            <a:spAutoFit/>
+          </a:bodyPr>
+          <a:lstStyle/>
+          <a:p>
+            <a:pPr algn="r">
+              <a:defRPr sz="1200" b="1">
+                <a:solidFill>
+                  <a:srgbClr val="B4C8E1"/>
+                </a:solidFill>
+                <a:latin typeface="微軟正黑體"/>
+              </a:defRPr>
+            </a:pPr>
+            <a:r>
+              <a:t>第 06 / 11 頁</a:t>
+            </a:r>
+          </a:p>
+        </p:txBody>
+      </p:sp>
+      <p:sp>
+        <p:nvSpPr>
+          <p:cNvPr id="7" name="TextBox 6"/>
+          <p:cNvSpPr txBox="1"/>
+          <p:nvPr/>
+        </p:nvSpPr>
+        <p:spPr>
+          <a:xfrm>
+            <a:off x="731520" y="365760"/>
             <a:ext cx="10698480" cy="594360"/>
           </a:xfrm>
           <a:prstGeom prst="rect">
@@ -5692,7 +7065,7 @@
           <a:lstStyle/>
           <a:p>
             <a:pPr>
-              <a:defRPr sz="2200" b="1">
+              <a:defRPr sz="2400" b="1">
                 <a:solidFill>
                   <a:srgbClr val="FFFFFF"/>
                 </a:solidFill>
@@ -5707,14 +7080,50 @@
       </p:sp>
       <p:sp>
         <p:nvSpPr>
-          <p:cNvPr id="5" name="Rounded Rectangle 4"/>
+          <p:cNvPr id="8" name="TextBox 7"/>
+          <p:cNvSpPr txBox="1"/>
+          <p:nvPr/>
+        </p:nvSpPr>
+        <p:spPr>
+          <a:xfrm>
+            <a:off x="731520" y="6510528"/>
+            <a:ext cx="10698480" cy="274320"/>
+          </a:xfrm>
+          <a:prstGeom prst="rect">
+            <a:avLst/>
+          </a:prstGeom>
+          <a:noFill/>
+        </p:spPr>
+        <p:txBody>
+          <a:bodyPr wrap="none">
+            <a:spAutoFit/>
+          </a:bodyPr>
+          <a:lstStyle/>
+          <a:p>
+            <a:pPr>
+              <a:defRPr sz="1050">
+                <a:solidFill>
+                  <a:srgbClr val="64748B"/>
+                </a:solidFill>
+                <a:latin typeface="微軟正黑體"/>
+              </a:defRPr>
+            </a:pPr>
+            <a:r>
+              <a:t>🌐 互動課程網頁：https://stjedu.github.io/www/esp32_mqtt_course.html   |   主講：簡樹桐 老師</a:t>
+            </a:r>
+          </a:p>
+        </p:txBody>
+      </p:sp>
+      <p:sp>
+        <p:nvSpPr>
+          <p:cNvPr id="9" name="Rounded Rectangle 8"/>
           <p:cNvSpPr/>
           <p:nvPr/>
         </p:nvSpPr>
         <p:spPr>
           <a:xfrm>
-            <a:off x="731520" y="1371600"/>
-            <a:ext cx="10698480" cy="2377440"/>
+            <a:off x="731520" y="1325880"/>
+            <a:ext cx="10698480" cy="2423160"/>
           </a:xfrm>
           <a:prstGeom prst="roundRect">
             <a:avLst/>
@@ -5752,14 +7161,14 @@
       </p:sp>
       <p:sp>
         <p:nvSpPr>
-          <p:cNvPr id="6" name="TextBox 5"/>
+          <p:cNvPr id="10" name="TextBox 9"/>
           <p:cNvSpPr txBox="1"/>
           <p:nvPr/>
         </p:nvSpPr>
         <p:spPr>
           <a:xfrm>
-            <a:off x="960120" y="1536192"/>
-            <a:ext cx="10241280" cy="2048256"/>
+            <a:off x="960120" y="1472184"/>
+            <a:ext cx="10241280" cy="2130552"/>
           </a:xfrm>
           <a:prstGeom prst="rect">
             <a:avLst/>
@@ -5774,7 +7183,7 @@
           <a:p>
             <a:pPr>
               <a:spcAft>
-                <a:spcPts val="800"/>
+                <a:spcPts val="600"/>
               </a:spcAft>
               <a:defRPr sz="1500" b="1">
                 <a:solidFill>
@@ -5784,17 +7193,20 @@
               </a:defRPr>
             </a:pPr>
             <a:r>
-              <a:t>💡 實戰提示詞 (Prompt)：四按鈕低電位動作之 OLED 碼表控制程式</a:t>
-            </a:r>
-          </a:p>
-          <a:p>
-            <a:pPr>
+              <a:t>💡 實戰提示詞 (Prompt)：四按鈕低電位動作之 OLED 碼表控制程式   [可直接反白複製]</a:t>
+            </a:r>
+          </a:p>
+          <a:p>
+            <a:pPr>
+              <a:lnSpc>
+                <a:spcPct val="120000"/>
+              </a:lnSpc>
               <a:spcAft>
-                <a:spcPts val="800"/>
+                <a:spcPts val="600"/>
               </a:spcAft>
             </a:pPr>
             <a:r>
-              <a:rPr sz="1200">
+              <a:rPr sz="1250">
                 <a:solidFill>
                   <a:srgbClr val="1E293B"/>
                 </a:solidFill>
@@ -5812,9 +7224,9 @@
           </a:p>
           <a:p>
             <a:r>
-              <a:rPr sz="1100" i="1">
-                <a:solidFill>
-                  <a:srgbClr val="64748B"/>
+              <a:rPr sz="1150" b="1">
+                <a:solidFill>
+                  <a:srgbClr val="0284C7"/>
                 </a:solidFill>
                 <a:latin typeface="微軟正黑體"/>
               </a:rPr>
@@ -5825,14 +7237,14 @@
       </p:sp>
       <p:sp>
         <p:nvSpPr>
-          <p:cNvPr id="7" name="Rounded Rectangle 6"/>
+          <p:cNvPr id="11" name="Rounded Rectangle 10"/>
           <p:cNvSpPr/>
           <p:nvPr/>
         </p:nvSpPr>
         <p:spPr>
           <a:xfrm>
-            <a:off x="731520" y="4023360"/>
-            <a:ext cx="10698480" cy="2377440"/>
+            <a:off x="731520" y="3931920"/>
+            <a:ext cx="10698480" cy="2423160"/>
           </a:xfrm>
           <a:prstGeom prst="roundRect">
             <a:avLst/>
@@ -5870,14 +7282,14 @@
       </p:sp>
       <p:sp>
         <p:nvSpPr>
-          <p:cNvPr id="8" name="TextBox 7"/>
+          <p:cNvPr id="12" name="TextBox 11"/>
           <p:cNvSpPr txBox="1"/>
           <p:nvPr/>
         </p:nvSpPr>
         <p:spPr>
           <a:xfrm>
-            <a:off x="960120" y="4187952"/>
-            <a:ext cx="10241280" cy="2048256"/>
+            <a:off x="960120" y="4078224"/>
+            <a:ext cx="10241280" cy="2130552"/>
           </a:xfrm>
           <a:prstGeom prst="rect">
             <a:avLst/>
@@ -5892,7 +7304,7 @@
           <a:p>
             <a:pPr>
               <a:spcAft>
-                <a:spcPts val="800"/>
+                <a:spcPts val="600"/>
               </a:spcAft>
               <a:defRPr sz="1500" b="1">
                 <a:solidFill>
@@ -5902,17 +7314,20 @@
               </a:defRPr>
             </a:pPr>
             <a:r>
-              <a:t>💡 實戰提示詞 (Prompt)：ESP32 連線 MQTT Broker (mqttgo.io) 雲端遙控</a:t>
-            </a:r>
-          </a:p>
-          <a:p>
-            <a:pPr>
+              <a:t>💡 實戰提示詞 (Prompt)：ESP32 連線 MQTT Broker (mqttgo.io) 雲端遙控   [可直接反白複製]</a:t>
+            </a:r>
+          </a:p>
+          <a:p>
+            <a:pPr>
+              <a:lnSpc>
+                <a:spcPct val="120000"/>
+              </a:lnSpc>
               <a:spcAft>
-                <a:spcPts val="800"/>
+                <a:spcPts val="600"/>
               </a:spcAft>
             </a:pPr>
             <a:r>
-              <a:rPr sz="1200">
+              <a:rPr sz="1250">
                 <a:solidFill>
                   <a:srgbClr val="1E293B"/>
                 </a:solidFill>
@@ -5928,9 +7343,9 @@
           </a:p>
           <a:p>
             <a:r>
-              <a:rPr sz="1100" i="1">
-                <a:solidFill>
-                  <a:srgbClr val="64748B"/>
+              <a:rPr sz="1150" b="1">
+                <a:solidFill>
+                  <a:srgbClr val="0284C7"/>
                 </a:solidFill>
                 <a:latin typeface="微軟正黑體"/>
               </a:rPr>
@@ -5944,6 +7359,9 @@
   <p:clrMapOvr>
     <a:masterClrMapping/>
   </p:clrMapOvr>
+  <p:transition spd="med">
+    <p:fade/>
+  </p:transition>
 </p:sld>
 </file>
 
@@ -5966,18 +7384,16 @@
         <p:spPr>
           <a:xfrm>
             <a:off x="0" y="0"/>
-            <a:ext cx="12191695" cy="1005840"/>
+            <a:ext cx="12191695" cy="6858000"/>
           </a:xfrm>
           <a:prstGeom prst="rect">
             <a:avLst/>
           </a:prstGeom>
           <a:solidFill>
-            <a:srgbClr val="0F172A"/>
+            <a:srgbClr val="F8FAFC"/>
           </a:solidFill>
           <a:ln>
-            <a:solidFill>
-              <a:srgbClr val="0F172A"/>
-            </a:solidFill>
+            <a:noFill/>
           </a:ln>
         </p:spPr>
         <p:style>
@@ -6004,14 +7420,100 @@
       </p:sp>
       <p:sp>
         <p:nvSpPr>
-          <p:cNvPr id="3" name="TextBox 2"/>
+          <p:cNvPr id="3" name="Rectangle 2"/>
+          <p:cNvSpPr/>
+          <p:nvPr/>
+        </p:nvSpPr>
+        <p:spPr>
+          <a:xfrm>
+            <a:off x="0" y="0"/>
+            <a:ext cx="12191695" cy="1051560"/>
+          </a:xfrm>
+          <a:prstGeom prst="rect">
+            <a:avLst/>
+          </a:prstGeom>
+          <a:solidFill>
+            <a:srgbClr val="0F172A"/>
+          </a:solidFill>
+          <a:ln>
+            <a:noFill/>
+          </a:ln>
+        </p:spPr>
+        <p:style>
+          <a:lnRef idx="1">
+            <a:schemeClr val="accent1"/>
+          </a:lnRef>
+          <a:fillRef idx="3">
+            <a:schemeClr val="accent1"/>
+          </a:fillRef>
+          <a:effectRef idx="2">
+            <a:schemeClr val="accent1"/>
+          </a:effectRef>
+          <a:fontRef idx="minor">
+            <a:schemeClr val="lt1"/>
+          </a:fontRef>
+        </p:style>
+        <p:txBody>
+          <a:bodyPr rtlCol="0" anchor="ctr"/>
+          <a:lstStyle/>
+          <a:p>
+            <a:pPr algn="ctr"/>
+          </a:p>
+        </p:txBody>
+      </p:sp>
+      <p:sp>
+        <p:nvSpPr>
+          <p:cNvPr id="4" name="Rectangle 3"/>
+          <p:cNvSpPr/>
+          <p:nvPr/>
+        </p:nvSpPr>
+        <p:spPr>
+          <a:xfrm>
+            <a:off x="0" y="1051560"/>
+            <a:ext cx="4114800" cy="45720"/>
+          </a:xfrm>
+          <a:prstGeom prst="rect">
+            <a:avLst/>
+          </a:prstGeom>
+          <a:solidFill>
+            <a:srgbClr val="0284C7"/>
+          </a:solidFill>
+          <a:ln>
+            <a:noFill/>
+          </a:ln>
+        </p:spPr>
+        <p:style>
+          <a:lnRef idx="1">
+            <a:schemeClr val="accent1"/>
+          </a:lnRef>
+          <a:fillRef idx="3">
+            <a:schemeClr val="accent1"/>
+          </a:fillRef>
+          <a:effectRef idx="2">
+            <a:schemeClr val="accent1"/>
+          </a:effectRef>
+          <a:fontRef idx="minor">
+            <a:schemeClr val="lt1"/>
+          </a:fontRef>
+        </p:style>
+        <p:txBody>
+          <a:bodyPr rtlCol="0" anchor="ctr"/>
+          <a:lstStyle/>
+          <a:p>
+            <a:pPr algn="ctr"/>
+          </a:p>
+        </p:txBody>
+      </p:sp>
+      <p:sp>
+        <p:nvSpPr>
+          <p:cNvPr id="5" name="TextBox 4"/>
           <p:cNvSpPr txBox="1"/>
           <p:nvPr/>
         </p:nvSpPr>
         <p:spPr>
           <a:xfrm>
             <a:off x="731520" y="109728"/>
-            <a:ext cx="10698480" cy="274320"/>
+            <a:ext cx="7772400" cy="274320"/>
           </a:xfrm>
           <a:prstGeom prst="rect">
             <a:avLst/>
@@ -6025,7 +7527,7 @@
           <a:lstStyle/>
           <a:p>
             <a:pPr>
-              <a:defRPr sz="1100" b="1">
+              <a:defRPr sz="1150" b="1">
                 <a:solidFill>
                   <a:srgbClr val="0284C7"/>
                 </a:solidFill>
@@ -6033,20 +7535,56 @@
               </a:defRPr>
             </a:pPr>
             <a:r>
-              <a:t>ESP32 ✕ 物聯網 MQTT ✕ 邊緣 AI 實戰</a:t>
-            </a:r>
-          </a:p>
-        </p:txBody>
-      </p:sp>
-      <p:sp>
-        <p:nvSpPr>
-          <p:cNvPr id="4" name="TextBox 3"/>
+              <a:t>📡 ESP32 ✕ 物聯網 MQTT ✕ 邊緣 AI 實戰</a:t>
+            </a:r>
+          </a:p>
+        </p:txBody>
+      </p:sp>
+      <p:sp>
+        <p:nvSpPr>
+          <p:cNvPr id="6" name="TextBox 5"/>
           <p:cNvSpPr txBox="1"/>
           <p:nvPr/>
         </p:nvSpPr>
         <p:spPr>
           <a:xfrm>
-            <a:off x="731520" y="320040"/>
+            <a:off x="9144000" y="109728"/>
+            <a:ext cx="2286000" cy="274320"/>
+          </a:xfrm>
+          <a:prstGeom prst="rect">
+            <a:avLst/>
+          </a:prstGeom>
+          <a:noFill/>
+        </p:spPr>
+        <p:txBody>
+          <a:bodyPr wrap="none">
+            <a:spAutoFit/>
+          </a:bodyPr>
+          <a:lstStyle/>
+          <a:p>
+            <a:pPr algn="r">
+              <a:defRPr sz="1200" b="1">
+                <a:solidFill>
+                  <a:srgbClr val="B4C8E1"/>
+                </a:solidFill>
+                <a:latin typeface="微軟正黑體"/>
+              </a:defRPr>
+            </a:pPr>
+            <a:r>
+              <a:t>第 07 / 11 頁</a:t>
+            </a:r>
+          </a:p>
+        </p:txBody>
+      </p:sp>
+      <p:sp>
+        <p:nvSpPr>
+          <p:cNvPr id="7" name="TextBox 6"/>
+          <p:cNvSpPr txBox="1"/>
+          <p:nvPr/>
+        </p:nvSpPr>
+        <p:spPr>
+          <a:xfrm>
+            <a:off x="731520" y="365760"/>
             <a:ext cx="10698480" cy="594360"/>
           </a:xfrm>
           <a:prstGeom prst="rect">
@@ -6061,7 +7599,7 @@
           <a:lstStyle/>
           <a:p>
             <a:pPr>
-              <a:defRPr sz="2200" b="1">
+              <a:defRPr sz="2400" b="1">
                 <a:solidFill>
                   <a:srgbClr val="FFFFFF"/>
                 </a:solidFill>
@@ -6076,14 +7614,50 @@
       </p:sp>
       <p:sp>
         <p:nvSpPr>
-          <p:cNvPr id="5" name="Rounded Rectangle 4"/>
+          <p:cNvPr id="8" name="TextBox 7"/>
+          <p:cNvSpPr txBox="1"/>
+          <p:nvPr/>
+        </p:nvSpPr>
+        <p:spPr>
+          <a:xfrm>
+            <a:off x="731520" y="6510528"/>
+            <a:ext cx="10698480" cy="274320"/>
+          </a:xfrm>
+          <a:prstGeom prst="rect">
+            <a:avLst/>
+          </a:prstGeom>
+          <a:noFill/>
+        </p:spPr>
+        <p:txBody>
+          <a:bodyPr wrap="none">
+            <a:spAutoFit/>
+          </a:bodyPr>
+          <a:lstStyle/>
+          <a:p>
+            <a:pPr>
+              <a:defRPr sz="1050">
+                <a:solidFill>
+                  <a:srgbClr val="64748B"/>
+                </a:solidFill>
+                <a:latin typeface="微軟正黑體"/>
+              </a:defRPr>
+            </a:pPr>
+            <a:r>
+              <a:t>🌐 互動課程網頁：https://stjedu.github.io/www/esp32_mqtt_course.html   |   主講：簡樹桐 老師</a:t>
+            </a:r>
+          </a:p>
+        </p:txBody>
+      </p:sp>
+      <p:sp>
+        <p:nvSpPr>
+          <p:cNvPr id="9" name="Rounded Rectangle 8"/>
           <p:cNvSpPr/>
           <p:nvPr/>
         </p:nvSpPr>
         <p:spPr>
           <a:xfrm>
-            <a:off x="731520" y="1371600"/>
-            <a:ext cx="5120640" cy="4937760"/>
+            <a:off x="731520" y="1325880"/>
+            <a:ext cx="5120640" cy="4983480"/>
           </a:xfrm>
           <a:prstGeom prst="roundRect">
             <a:avLst/>
@@ -6121,14 +7695,57 @@
       </p:sp>
       <p:sp>
         <p:nvSpPr>
-          <p:cNvPr id="6" name="TextBox 5"/>
+          <p:cNvPr id="10" name="Rounded Rectangle 9"/>
+          <p:cNvSpPr/>
+          <p:nvPr/>
+        </p:nvSpPr>
+        <p:spPr>
+          <a:xfrm>
+            <a:off x="731520" y="1325880"/>
+            <a:ext cx="5120640" cy="91440"/>
+          </a:xfrm>
+          <a:prstGeom prst="roundRect">
+            <a:avLst/>
+          </a:prstGeom>
+          <a:solidFill>
+            <a:srgbClr val="0284C7"/>
+          </a:solidFill>
+          <a:ln>
+            <a:noFill/>
+          </a:ln>
+        </p:spPr>
+        <p:style>
+          <a:lnRef idx="1">
+            <a:schemeClr val="accent1"/>
+          </a:lnRef>
+          <a:fillRef idx="3">
+            <a:schemeClr val="accent1"/>
+          </a:fillRef>
+          <a:effectRef idx="2">
+            <a:schemeClr val="accent1"/>
+          </a:effectRef>
+          <a:fontRef idx="minor">
+            <a:schemeClr val="lt1"/>
+          </a:fontRef>
+        </p:style>
+        <p:txBody>
+          <a:bodyPr rtlCol="0" anchor="ctr"/>
+          <a:lstStyle/>
+          <a:p>
+            <a:pPr algn="ctr"/>
+          </a:p>
+        </p:txBody>
+      </p:sp>
+      <p:sp>
+        <p:nvSpPr>
+          <p:cNvPr id="11" name="TextBox 10"/>
           <p:cNvSpPr txBox="1"/>
           <p:nvPr/>
         </p:nvSpPr>
         <p:spPr>
           <a:xfrm>
-            <a:off x="914400" y="1508760"/>
-            <a:ext cx="4754880" cy="4663440"/>
+            <a:off x="960120" y="1508760"/>
+            <a:ext cx="4663440" cy="4663440"/>
           </a:xfrm>
           <a:prstGeom prst="rect">
             <a:avLst/>
@@ -6145,7 +7762,7 @@
               <a:spcAft>
                 <a:spcPts val="1000"/>
               </a:spcAft>
-              <a:defRPr sz="1600" b="1">
+              <a:defRPr sz="1750" b="1">
                 <a:solidFill>
                   <a:srgbClr val="0F172A"/>
                 </a:solidFill>
@@ -6158,12 +7775,15 @@
           </a:p>
           <a:p>
             <a:pPr>
+              <a:lnSpc>
+                <a:spcPct val="125000"/>
+              </a:lnSpc>
               <a:spcAft>
-                <a:spcPts val="600"/>
+                <a:spcPts val="700"/>
               </a:spcAft>
             </a:pPr>
             <a:r>
-              <a:rPr b="1" sz="1300">
+              <a:rPr b="1" sz="1350">
                 <a:solidFill>
                   <a:srgbClr val="0F172A"/>
                 </a:solidFill>
@@ -6172,7 +7792,7 @@
               <a:t>步驟 1：硬體與環境檢查 </a:t>
             </a:r>
             <a:r>
-              <a:rPr b="0" sz="1300">
+              <a:rPr b="0" sz="1350">
                 <a:solidFill>
                   <a:srgbClr val="64748B"/>
                 </a:solidFill>
@@ -6183,12 +7803,15 @@
           </a:p>
           <a:p>
             <a:pPr>
+              <a:lnSpc>
+                <a:spcPct val="125000"/>
+              </a:lnSpc>
               <a:spcAft>
-                <a:spcPts val="600"/>
+                <a:spcPts val="700"/>
               </a:spcAft>
             </a:pPr>
             <a:r>
-              <a:rPr b="1" sz="1300">
+              <a:rPr b="1" sz="1350">
                 <a:solidFill>
                   <a:srgbClr val="0F172A"/>
                 </a:solidFill>
@@ -6197,7 +7820,7 @@
               <a:t>步驟 2：三種核心模式切換 </a:t>
             </a:r>
             <a:r>
-              <a:rPr b="0" sz="1300">
+              <a:rPr b="0" sz="1350">
                 <a:solidFill>
                   <a:srgbClr val="64748B"/>
                 </a:solidFill>
@@ -6208,12 +7831,15 @@
           </a:p>
           <a:p>
             <a:pPr>
+              <a:lnSpc>
+                <a:spcPct val="125000"/>
+              </a:lnSpc>
               <a:spcAft>
-                <a:spcPts val="600"/>
+                <a:spcPts val="700"/>
               </a:spcAft>
             </a:pPr>
             <a:r>
-              <a:rPr b="1" sz="1300">
+              <a:rPr b="1" sz="1350">
                 <a:solidFill>
                   <a:srgbClr val="0F172A"/>
                 </a:solidFill>
@@ -6222,7 +7848,7 @@
               <a:t>步驟 3：即時物件分類總數統計 </a:t>
             </a:r>
             <a:r>
-              <a:rPr b="0" sz="1300">
+              <a:rPr b="0" sz="1350">
                 <a:solidFill>
                   <a:srgbClr val="64748B"/>
                 </a:solidFill>
@@ -6233,12 +7859,15 @@
           </a:p>
           <a:p>
             <a:pPr>
+              <a:lnSpc>
+                <a:spcPct val="125000"/>
+              </a:lnSpc>
               <a:spcAft>
-                <a:spcPts val="600"/>
+                <a:spcPts val="700"/>
               </a:spcAft>
             </a:pPr>
             <a:r>
-              <a:rPr b="1" sz="1300">
+              <a:rPr b="1" sz="1350">
                 <a:solidFill>
                   <a:srgbClr val="0F172A"/>
                 </a:solidFill>
@@ -6247,7 +7876,7 @@
               <a:t>步驟 4：截圖除錯 (Screenshot Debug) </a:t>
             </a:r>
             <a:r>
-              <a:rPr b="0" sz="1300">
+              <a:rPr b="0" sz="1350">
                 <a:solidFill>
                   <a:srgbClr val="64748B"/>
                 </a:solidFill>
@@ -6258,12 +7887,15 @@
           </a:p>
           <a:p>
             <a:pPr>
+              <a:lnSpc>
+                <a:spcPct val="125000"/>
+              </a:lnSpc>
               <a:spcAft>
-                <a:spcPts val="600"/>
+                <a:spcPts val="700"/>
               </a:spcAft>
             </a:pPr>
             <a:r>
-              <a:rPr b="1" sz="1300">
+              <a:rPr b="1" sz="1350">
                 <a:solidFill>
                   <a:srgbClr val="0F172A"/>
                 </a:solidFill>
@@ -6272,7 +7904,7 @@
               <a:t>步驟 5：專題延伸思考 </a:t>
             </a:r>
             <a:r>
-              <a:rPr b="0" sz="1300">
+              <a:rPr b="0" sz="1350">
                 <a:solidFill>
                   <a:srgbClr val="64748B"/>
                 </a:solidFill>
@@ -6285,14 +7917,14 @@
       </p:sp>
       <p:sp>
         <p:nvSpPr>
-          <p:cNvPr id="7" name="Rounded Rectangle 6"/>
+          <p:cNvPr id="12" name="Rounded Rectangle 11"/>
           <p:cNvSpPr/>
           <p:nvPr/>
         </p:nvSpPr>
         <p:spPr>
           <a:xfrm>
-            <a:off x="6309360" y="1371600"/>
-            <a:ext cx="5120640" cy="4937760"/>
+            <a:off x="6309360" y="1325880"/>
+            <a:ext cx="5120640" cy="4983480"/>
           </a:xfrm>
           <a:prstGeom prst="roundRect">
             <a:avLst/>
@@ -6330,14 +7962,57 @@
       </p:sp>
       <p:sp>
         <p:nvSpPr>
-          <p:cNvPr id="8" name="TextBox 7"/>
+          <p:cNvPr id="13" name="Rounded Rectangle 12"/>
+          <p:cNvSpPr/>
+          <p:nvPr/>
+        </p:nvSpPr>
+        <p:spPr>
+          <a:xfrm>
+            <a:off x="6309360" y="1325880"/>
+            <a:ext cx="5120640" cy="91440"/>
+          </a:xfrm>
+          <a:prstGeom prst="roundRect">
+            <a:avLst/>
+          </a:prstGeom>
+          <a:solidFill>
+            <a:srgbClr val="D97706"/>
+          </a:solidFill>
+          <a:ln>
+            <a:noFill/>
+          </a:ln>
+        </p:spPr>
+        <p:style>
+          <a:lnRef idx="1">
+            <a:schemeClr val="accent1"/>
+          </a:lnRef>
+          <a:fillRef idx="3">
+            <a:schemeClr val="accent1"/>
+          </a:fillRef>
+          <a:effectRef idx="2">
+            <a:schemeClr val="accent1"/>
+          </a:effectRef>
+          <a:fontRef idx="minor">
+            <a:schemeClr val="lt1"/>
+          </a:fontRef>
+        </p:style>
+        <p:txBody>
+          <a:bodyPr rtlCol="0" anchor="ctr"/>
+          <a:lstStyle/>
+          <a:p>
+            <a:pPr algn="ctr"/>
+          </a:p>
+        </p:txBody>
+      </p:sp>
+      <p:sp>
+        <p:nvSpPr>
+          <p:cNvPr id="14" name="TextBox 13"/>
           <p:cNvSpPr txBox="1"/>
           <p:nvPr/>
         </p:nvSpPr>
         <p:spPr>
           <a:xfrm>
-            <a:off x="6492240" y="1508760"/>
-            <a:ext cx="4754880" cy="4663440"/>
+            <a:off x="6537960" y="1508760"/>
+            <a:ext cx="4663440" cy="4663440"/>
           </a:xfrm>
           <a:prstGeom prst="rect">
             <a:avLst/>
@@ -6354,7 +8029,7 @@
               <a:spcAft>
                 <a:spcPts val="1000"/>
               </a:spcAft>
-              <a:defRPr sz="1600" b="1">
+              <a:defRPr sz="1750" b="1">
                 <a:solidFill>
                   <a:srgbClr val="0F172A"/>
                 </a:solidFill>
@@ -6367,12 +8042,15 @@
           </a:p>
           <a:p>
             <a:pPr>
+              <a:lnSpc>
+                <a:spcPct val="125000"/>
+              </a:lnSpc>
               <a:spcAft>
-                <a:spcPts val="600"/>
+                <a:spcPts val="700"/>
               </a:spcAft>
             </a:pPr>
             <a:r>
-              <a:rPr b="1" sz="1300">
+              <a:rPr b="1" sz="1350">
                 <a:solidFill>
                   <a:srgbClr val="0F172A"/>
                 </a:solidFill>
@@ -6381,7 +8059,7 @@
               <a:t>「我只動嘴巴就好了」： </a:t>
             </a:r>
             <a:r>
-              <a:rPr b="0" sz="1300">
+              <a:rPr b="0" sz="1350">
                 <a:solidFill>
                   <a:srgbClr val="64748B"/>
                 </a:solidFill>
@@ -6392,12 +8070,15 @@
           </a:p>
           <a:p>
             <a:pPr>
+              <a:lnSpc>
+                <a:spcPct val="125000"/>
+              </a:lnSpc>
               <a:spcAft>
-                <a:spcPts val="600"/>
+                <a:spcPts val="700"/>
               </a:spcAft>
             </a:pPr>
             <a:r>
-              <a:rPr b="1" sz="1300">
+              <a:rPr b="1" sz="1350">
                 <a:solidFill>
                   <a:srgbClr val="0F172A"/>
                 </a:solidFill>
@@ -6406,7 +8087,7 @@
               <a:t>算力與解析度的取捨： </a:t>
             </a:r>
             <a:r>
-              <a:rPr b="0" sz="1300">
+              <a:rPr b="0" sz="1350">
                 <a:solidFill>
                   <a:srgbClr val="64748B"/>
                 </a:solidFill>
@@ -6417,12 +8098,15 @@
           </a:p>
           <a:p>
             <a:pPr>
+              <a:lnSpc>
+                <a:spcPct val="125000"/>
+              </a:lnSpc>
               <a:spcAft>
-                <a:spcPts val="600"/>
+                <a:spcPts val="700"/>
               </a:spcAft>
             </a:pPr>
             <a:r>
-              <a:rPr b="1" sz="1300">
+              <a:rPr b="1" sz="1350">
                 <a:solidFill>
                   <a:srgbClr val="0F172A"/>
                 </a:solidFill>
@@ -6431,7 +8115,7 @@
               <a:t>專案不要閉門造車： </a:t>
             </a:r>
             <a:r>
-              <a:rPr b="0" sz="1300">
+              <a:rPr b="0" sz="1350">
                 <a:solidFill>
                   <a:srgbClr val="64748B"/>
                 </a:solidFill>
@@ -6442,12 +8126,15 @@
           </a:p>
           <a:p>
             <a:pPr>
+              <a:lnSpc>
+                <a:spcPct val="125000"/>
+              </a:lnSpc>
               <a:spcAft>
-                <a:spcPts val="600"/>
+                <a:spcPts val="700"/>
               </a:spcAft>
             </a:pPr>
             <a:r>
-              <a:rPr b="1" sz="1300">
+              <a:rPr b="1" sz="1350">
                 <a:solidFill>
                   <a:srgbClr val="0F172A"/>
                 </a:solidFill>
@@ -6456,7 +8143,7 @@
               <a:t>比賽與商品化思維： </a:t>
             </a:r>
             <a:r>
-              <a:rPr b="0" sz="1300">
+              <a:rPr b="0" sz="1350">
                 <a:solidFill>
                   <a:srgbClr val="64748B"/>
                 </a:solidFill>
@@ -6472,6 +8159,9 @@
   <p:clrMapOvr>
     <a:masterClrMapping/>
   </p:clrMapOvr>
+  <p:transition spd="med">
+    <p:fade/>
+  </p:transition>
 </p:sld>
 </file>
 
@@ -6494,18 +8184,16 @@
         <p:spPr>
           <a:xfrm>
             <a:off x="0" y="0"/>
-            <a:ext cx="12191695" cy="1005840"/>
+            <a:ext cx="12191695" cy="6858000"/>
           </a:xfrm>
           <a:prstGeom prst="rect">
             <a:avLst/>
           </a:prstGeom>
           <a:solidFill>
-            <a:srgbClr val="0F172A"/>
+            <a:srgbClr val="F8FAFC"/>
           </a:solidFill>
           <a:ln>
-            <a:solidFill>
-              <a:srgbClr val="0F172A"/>
-            </a:solidFill>
+            <a:noFill/>
           </a:ln>
         </p:spPr>
         <p:style>
@@ -6532,14 +8220,100 @@
       </p:sp>
       <p:sp>
         <p:nvSpPr>
-          <p:cNvPr id="3" name="TextBox 2"/>
+          <p:cNvPr id="3" name="Rectangle 2"/>
+          <p:cNvSpPr/>
+          <p:nvPr/>
+        </p:nvSpPr>
+        <p:spPr>
+          <a:xfrm>
+            <a:off x="0" y="0"/>
+            <a:ext cx="12191695" cy="1051560"/>
+          </a:xfrm>
+          <a:prstGeom prst="rect">
+            <a:avLst/>
+          </a:prstGeom>
+          <a:solidFill>
+            <a:srgbClr val="0F172A"/>
+          </a:solidFill>
+          <a:ln>
+            <a:noFill/>
+          </a:ln>
+        </p:spPr>
+        <p:style>
+          <a:lnRef idx="1">
+            <a:schemeClr val="accent1"/>
+          </a:lnRef>
+          <a:fillRef idx="3">
+            <a:schemeClr val="accent1"/>
+          </a:fillRef>
+          <a:effectRef idx="2">
+            <a:schemeClr val="accent1"/>
+          </a:effectRef>
+          <a:fontRef idx="minor">
+            <a:schemeClr val="lt1"/>
+          </a:fontRef>
+        </p:style>
+        <p:txBody>
+          <a:bodyPr rtlCol="0" anchor="ctr"/>
+          <a:lstStyle/>
+          <a:p>
+            <a:pPr algn="ctr"/>
+          </a:p>
+        </p:txBody>
+      </p:sp>
+      <p:sp>
+        <p:nvSpPr>
+          <p:cNvPr id="4" name="Rectangle 3"/>
+          <p:cNvSpPr/>
+          <p:nvPr/>
+        </p:nvSpPr>
+        <p:spPr>
+          <a:xfrm>
+            <a:off x="0" y="1051560"/>
+            <a:ext cx="4114800" cy="45720"/>
+          </a:xfrm>
+          <a:prstGeom prst="rect">
+            <a:avLst/>
+          </a:prstGeom>
+          <a:solidFill>
+            <a:srgbClr val="0284C7"/>
+          </a:solidFill>
+          <a:ln>
+            <a:noFill/>
+          </a:ln>
+        </p:spPr>
+        <p:style>
+          <a:lnRef idx="1">
+            <a:schemeClr val="accent1"/>
+          </a:lnRef>
+          <a:fillRef idx="3">
+            <a:schemeClr val="accent1"/>
+          </a:fillRef>
+          <a:effectRef idx="2">
+            <a:schemeClr val="accent1"/>
+          </a:effectRef>
+          <a:fontRef idx="minor">
+            <a:schemeClr val="lt1"/>
+          </a:fontRef>
+        </p:style>
+        <p:txBody>
+          <a:bodyPr rtlCol="0" anchor="ctr"/>
+          <a:lstStyle/>
+          <a:p>
+            <a:pPr algn="ctr"/>
+          </a:p>
+        </p:txBody>
+      </p:sp>
+      <p:sp>
+        <p:nvSpPr>
+          <p:cNvPr id="5" name="TextBox 4"/>
           <p:cNvSpPr txBox="1"/>
           <p:nvPr/>
         </p:nvSpPr>
         <p:spPr>
           <a:xfrm>
             <a:off x="731520" y="109728"/>
-            <a:ext cx="10698480" cy="274320"/>
+            <a:ext cx="7772400" cy="274320"/>
           </a:xfrm>
           <a:prstGeom prst="rect">
             <a:avLst/>
@@ -6553,7 +8327,7 @@
           <a:lstStyle/>
           <a:p>
             <a:pPr>
-              <a:defRPr sz="1100" b="1">
+              <a:defRPr sz="1150" b="1">
                 <a:solidFill>
                   <a:srgbClr val="0284C7"/>
                 </a:solidFill>
@@ -6561,20 +8335,56 @@
               </a:defRPr>
             </a:pPr>
             <a:r>
-              <a:t>ESP32 ✕ 物聯網 MQTT ✕ 邊緣 AI 實戰</a:t>
-            </a:r>
-          </a:p>
-        </p:txBody>
-      </p:sp>
-      <p:sp>
-        <p:nvSpPr>
-          <p:cNvPr id="4" name="TextBox 3"/>
+              <a:t>📡 ESP32 ✕ 物聯網 MQTT ✕ 邊緣 AI 實戰</a:t>
+            </a:r>
+          </a:p>
+        </p:txBody>
+      </p:sp>
+      <p:sp>
+        <p:nvSpPr>
+          <p:cNvPr id="6" name="TextBox 5"/>
           <p:cNvSpPr txBox="1"/>
           <p:nvPr/>
         </p:nvSpPr>
         <p:spPr>
           <a:xfrm>
-            <a:off x="731520" y="320040"/>
+            <a:off x="9144000" y="109728"/>
+            <a:ext cx="2286000" cy="274320"/>
+          </a:xfrm>
+          <a:prstGeom prst="rect">
+            <a:avLst/>
+          </a:prstGeom>
+          <a:noFill/>
+        </p:spPr>
+        <p:txBody>
+          <a:bodyPr wrap="none">
+            <a:spAutoFit/>
+          </a:bodyPr>
+          <a:lstStyle/>
+          <a:p>
+            <a:pPr algn="r">
+              <a:defRPr sz="1200" b="1">
+                <a:solidFill>
+                  <a:srgbClr val="B4C8E1"/>
+                </a:solidFill>
+                <a:latin typeface="微軟正黑體"/>
+              </a:defRPr>
+            </a:pPr>
+            <a:r>
+              <a:t>第 08 / 11 頁</a:t>
+            </a:r>
+          </a:p>
+        </p:txBody>
+      </p:sp>
+      <p:sp>
+        <p:nvSpPr>
+          <p:cNvPr id="7" name="TextBox 6"/>
+          <p:cNvSpPr txBox="1"/>
+          <p:nvPr/>
+        </p:nvSpPr>
+        <p:spPr>
+          <a:xfrm>
+            <a:off x="731520" y="365760"/>
             <a:ext cx="10698480" cy="594360"/>
           </a:xfrm>
           <a:prstGeom prst="rect">
@@ -6589,7 +8399,7 @@
           <a:lstStyle/>
           <a:p>
             <a:pPr>
-              <a:defRPr sz="2200" b="1">
+              <a:defRPr sz="2400" b="1">
                 <a:solidFill>
                   <a:srgbClr val="FFFFFF"/>
                 </a:solidFill>
@@ -6604,14 +8414,50 @@
       </p:sp>
       <p:sp>
         <p:nvSpPr>
-          <p:cNvPr id="5" name="Rounded Rectangle 4"/>
+          <p:cNvPr id="8" name="TextBox 7"/>
+          <p:cNvSpPr txBox="1"/>
+          <p:nvPr/>
+        </p:nvSpPr>
+        <p:spPr>
+          <a:xfrm>
+            <a:off x="731520" y="6510528"/>
+            <a:ext cx="10698480" cy="274320"/>
+          </a:xfrm>
+          <a:prstGeom prst="rect">
+            <a:avLst/>
+          </a:prstGeom>
+          <a:noFill/>
+        </p:spPr>
+        <p:txBody>
+          <a:bodyPr wrap="none">
+            <a:spAutoFit/>
+          </a:bodyPr>
+          <a:lstStyle/>
+          <a:p>
+            <a:pPr>
+              <a:defRPr sz="1050">
+                <a:solidFill>
+                  <a:srgbClr val="64748B"/>
+                </a:solidFill>
+                <a:latin typeface="微軟正黑體"/>
+              </a:defRPr>
+            </a:pPr>
+            <a:r>
+              <a:t>🌐 互動課程網頁：https://stjedu.github.io/www/esp32_mqtt_course.html   |   主講：簡樹桐 老師</a:t>
+            </a:r>
+          </a:p>
+        </p:txBody>
+      </p:sp>
+      <p:sp>
+        <p:nvSpPr>
+          <p:cNvPr id="9" name="Rounded Rectangle 8"/>
           <p:cNvSpPr/>
           <p:nvPr/>
         </p:nvSpPr>
         <p:spPr>
           <a:xfrm>
-            <a:off x="731520" y="1371600"/>
-            <a:ext cx="10698480" cy="2377440"/>
+            <a:off x="731520" y="1325880"/>
+            <a:ext cx="10698480" cy="2423160"/>
           </a:xfrm>
           <a:prstGeom prst="roundRect">
             <a:avLst/>
@@ -6649,14 +8495,14 @@
       </p:sp>
       <p:sp>
         <p:nvSpPr>
-          <p:cNvPr id="6" name="TextBox 5"/>
+          <p:cNvPr id="10" name="TextBox 9"/>
           <p:cNvSpPr txBox="1"/>
           <p:nvPr/>
         </p:nvSpPr>
         <p:spPr>
           <a:xfrm>
-            <a:off x="960120" y="1536192"/>
-            <a:ext cx="10241280" cy="2048256"/>
+            <a:off x="960120" y="1472184"/>
+            <a:ext cx="10241280" cy="2130552"/>
           </a:xfrm>
           <a:prstGeom prst="rect">
             <a:avLst/>
@@ -6671,7 +8517,7 @@
           <a:p>
             <a:pPr>
               <a:spcAft>
-                <a:spcPts val="800"/>
+                <a:spcPts val="600"/>
               </a:spcAft>
               <a:defRPr sz="1500" b="1">
                 <a:solidFill>
@@ -6681,17 +8527,20 @@
               </a:defRPr>
             </a:pPr>
             <a:r>
-              <a:t>💡 實戰提示詞 (Prompt)：OpenCV + YOLO11 三合一模式切換與繁體中文標籤</a:t>
-            </a:r>
-          </a:p>
-          <a:p>
-            <a:pPr>
+              <a:t>💡 實戰提示詞 (Prompt)：OpenCV + YOLO11 三合一模式切換與繁體中文標籤   [可直接反白複製]</a:t>
+            </a:r>
+          </a:p>
+          <a:p>
+            <a:pPr>
+              <a:lnSpc>
+                <a:spcPct val="120000"/>
+              </a:lnSpc>
               <a:spcAft>
-                <a:spcPts val="800"/>
+                <a:spcPts val="600"/>
               </a:spcAft>
             </a:pPr>
             <a:r>
-              <a:rPr sz="1200">
+              <a:rPr sz="1250">
                 <a:solidFill>
                   <a:srgbClr val="1E293B"/>
                 </a:solidFill>
@@ -6708,9 +8557,9 @@
           </a:p>
           <a:p>
             <a:r>
-              <a:rPr sz="1100" i="1">
-                <a:solidFill>
-                  <a:srgbClr val="64748B"/>
+              <a:rPr sz="1150" b="1">
+                <a:solidFill>
+                  <a:srgbClr val="0284C7"/>
                 </a:solidFill>
                 <a:latin typeface="微軟正黑體"/>
               </a:rPr>
@@ -6721,14 +8570,14 @@
       </p:sp>
       <p:sp>
         <p:nvSpPr>
-          <p:cNvPr id="7" name="Rounded Rectangle 6"/>
+          <p:cNvPr id="11" name="Rounded Rectangle 10"/>
           <p:cNvSpPr/>
           <p:nvPr/>
         </p:nvSpPr>
         <p:spPr>
           <a:xfrm>
-            <a:off x="731520" y="4023360"/>
-            <a:ext cx="10698480" cy="2377440"/>
+            <a:off x="731520" y="3931920"/>
+            <a:ext cx="10698480" cy="2423160"/>
           </a:xfrm>
           <a:prstGeom prst="roundRect">
             <a:avLst/>
@@ -6766,14 +8615,14 @@
       </p:sp>
       <p:sp>
         <p:nvSpPr>
-          <p:cNvPr id="8" name="TextBox 7"/>
+          <p:cNvPr id="12" name="TextBox 11"/>
           <p:cNvSpPr txBox="1"/>
           <p:nvPr/>
         </p:nvSpPr>
         <p:spPr>
           <a:xfrm>
-            <a:off x="960120" y="4187952"/>
-            <a:ext cx="10241280" cy="2048256"/>
+            <a:off x="960120" y="4078224"/>
+            <a:ext cx="10241280" cy="2130552"/>
           </a:xfrm>
           <a:prstGeom prst="rect">
             <a:avLst/>
@@ -6788,7 +8637,7 @@
           <a:p>
             <a:pPr>
               <a:spcAft>
-                <a:spcPts val="800"/>
+                <a:spcPts val="600"/>
               </a:spcAft>
               <a:defRPr sz="1500" b="1">
                 <a:solidFill>
@@ -6798,17 +8647,20 @@
               </a:defRPr>
             </a:pPr>
             <a:r>
-              <a:t>💡 實戰提示詞 (Prompt)：現場物件類別數量即時統計與報表看板</a:t>
-            </a:r>
-          </a:p>
-          <a:p>
-            <a:pPr>
+              <a:t>💡 實戰提示詞 (Prompt)：現場物件類別數量即時統計與報表看板   [可直接反白複製]</a:t>
+            </a:r>
+          </a:p>
+          <a:p>
+            <a:pPr>
+              <a:lnSpc>
+                <a:spcPct val="120000"/>
+              </a:lnSpc>
               <a:spcAft>
-                <a:spcPts val="800"/>
+                <a:spcPts val="600"/>
               </a:spcAft>
             </a:pPr>
             <a:r>
-              <a:rPr sz="1200">
+              <a:rPr sz="1250">
                 <a:solidFill>
                   <a:srgbClr val="1E293B"/>
                 </a:solidFill>
@@ -6823,9 +8675,9 @@
           </a:p>
           <a:p>
             <a:r>
-              <a:rPr sz="1100" i="1">
-                <a:solidFill>
-                  <a:srgbClr val="64748B"/>
+              <a:rPr sz="1150" b="1">
+                <a:solidFill>
+                  <a:srgbClr val="0284C7"/>
                 </a:solidFill>
                 <a:latin typeface="微軟正黑體"/>
               </a:rPr>
@@ -6839,6 +8691,9 @@
   <p:clrMapOvr>
     <a:masterClrMapping/>
   </p:clrMapOvr>
+  <p:transition spd="med">
+    <p:fade/>
+  </p:transition>
 </p:sld>
 </file>
 
@@ -6861,18 +8716,16 @@
         <p:spPr>
           <a:xfrm>
             <a:off x="0" y="0"/>
-            <a:ext cx="12191695" cy="1005840"/>
+            <a:ext cx="12191695" cy="6858000"/>
           </a:xfrm>
           <a:prstGeom prst="rect">
             <a:avLst/>
           </a:prstGeom>
           <a:solidFill>
-            <a:srgbClr val="0F172A"/>
+            <a:srgbClr val="F8FAFC"/>
           </a:solidFill>
           <a:ln>
-            <a:solidFill>
-              <a:srgbClr val="0F172A"/>
-            </a:solidFill>
+            <a:noFill/>
           </a:ln>
         </p:spPr>
         <p:style>
@@ -6899,14 +8752,100 @@
       </p:sp>
       <p:sp>
         <p:nvSpPr>
-          <p:cNvPr id="3" name="TextBox 2"/>
+          <p:cNvPr id="3" name="Rectangle 2"/>
+          <p:cNvSpPr/>
+          <p:nvPr/>
+        </p:nvSpPr>
+        <p:spPr>
+          <a:xfrm>
+            <a:off x="0" y="0"/>
+            <a:ext cx="12191695" cy="1051560"/>
+          </a:xfrm>
+          <a:prstGeom prst="rect">
+            <a:avLst/>
+          </a:prstGeom>
+          <a:solidFill>
+            <a:srgbClr val="0F172A"/>
+          </a:solidFill>
+          <a:ln>
+            <a:noFill/>
+          </a:ln>
+        </p:spPr>
+        <p:style>
+          <a:lnRef idx="1">
+            <a:schemeClr val="accent1"/>
+          </a:lnRef>
+          <a:fillRef idx="3">
+            <a:schemeClr val="accent1"/>
+          </a:fillRef>
+          <a:effectRef idx="2">
+            <a:schemeClr val="accent1"/>
+          </a:effectRef>
+          <a:fontRef idx="minor">
+            <a:schemeClr val="lt1"/>
+          </a:fontRef>
+        </p:style>
+        <p:txBody>
+          <a:bodyPr rtlCol="0" anchor="ctr"/>
+          <a:lstStyle/>
+          <a:p>
+            <a:pPr algn="ctr"/>
+          </a:p>
+        </p:txBody>
+      </p:sp>
+      <p:sp>
+        <p:nvSpPr>
+          <p:cNvPr id="4" name="Rectangle 3"/>
+          <p:cNvSpPr/>
+          <p:nvPr/>
+        </p:nvSpPr>
+        <p:spPr>
+          <a:xfrm>
+            <a:off x="0" y="1051560"/>
+            <a:ext cx="4114800" cy="45720"/>
+          </a:xfrm>
+          <a:prstGeom prst="rect">
+            <a:avLst/>
+          </a:prstGeom>
+          <a:solidFill>
+            <a:srgbClr val="0284C7"/>
+          </a:solidFill>
+          <a:ln>
+            <a:noFill/>
+          </a:ln>
+        </p:spPr>
+        <p:style>
+          <a:lnRef idx="1">
+            <a:schemeClr val="accent1"/>
+          </a:lnRef>
+          <a:fillRef idx="3">
+            <a:schemeClr val="accent1"/>
+          </a:fillRef>
+          <a:effectRef idx="2">
+            <a:schemeClr val="accent1"/>
+          </a:effectRef>
+          <a:fontRef idx="minor">
+            <a:schemeClr val="lt1"/>
+          </a:fontRef>
+        </p:style>
+        <p:txBody>
+          <a:bodyPr rtlCol="0" anchor="ctr"/>
+          <a:lstStyle/>
+          <a:p>
+            <a:pPr algn="ctr"/>
+          </a:p>
+        </p:txBody>
+      </p:sp>
+      <p:sp>
+        <p:nvSpPr>
+          <p:cNvPr id="5" name="TextBox 4"/>
           <p:cNvSpPr txBox="1"/>
           <p:nvPr/>
         </p:nvSpPr>
         <p:spPr>
           <a:xfrm>
             <a:off x="731520" y="109728"/>
-            <a:ext cx="10698480" cy="274320"/>
+            <a:ext cx="7772400" cy="274320"/>
           </a:xfrm>
           <a:prstGeom prst="rect">
             <a:avLst/>
@@ -6920,7 +8859,7 @@
           <a:lstStyle/>
           <a:p>
             <a:pPr>
-              <a:defRPr sz="1100" b="1">
+              <a:defRPr sz="1150" b="1">
                 <a:solidFill>
                   <a:srgbClr val="0284C7"/>
                 </a:solidFill>
@@ -6928,20 +8867,56 @@
               </a:defRPr>
             </a:pPr>
             <a:r>
-              <a:t>ESP32 ✕ 物聯網 MQTT ✕ 邊緣 AI 實戰</a:t>
-            </a:r>
-          </a:p>
-        </p:txBody>
-      </p:sp>
-      <p:sp>
-        <p:nvSpPr>
-          <p:cNvPr id="4" name="TextBox 3"/>
+              <a:t>📡 ESP32 ✕ 物聯網 MQTT ✕ 邊緣 AI 實戰</a:t>
+            </a:r>
+          </a:p>
+        </p:txBody>
+      </p:sp>
+      <p:sp>
+        <p:nvSpPr>
+          <p:cNvPr id="6" name="TextBox 5"/>
           <p:cNvSpPr txBox="1"/>
           <p:nvPr/>
         </p:nvSpPr>
         <p:spPr>
           <a:xfrm>
-            <a:off x="731520" y="320040"/>
+            <a:off x="9144000" y="109728"/>
+            <a:ext cx="2286000" cy="274320"/>
+          </a:xfrm>
+          <a:prstGeom prst="rect">
+            <a:avLst/>
+          </a:prstGeom>
+          <a:noFill/>
+        </p:spPr>
+        <p:txBody>
+          <a:bodyPr wrap="none">
+            <a:spAutoFit/>
+          </a:bodyPr>
+          <a:lstStyle/>
+          <a:p>
+            <a:pPr algn="r">
+              <a:defRPr sz="1200" b="1">
+                <a:solidFill>
+                  <a:srgbClr val="B4C8E1"/>
+                </a:solidFill>
+                <a:latin typeface="微軟正黑體"/>
+              </a:defRPr>
+            </a:pPr>
+            <a:r>
+              <a:t>第 09 / 11 頁</a:t>
+            </a:r>
+          </a:p>
+        </p:txBody>
+      </p:sp>
+      <p:sp>
+        <p:nvSpPr>
+          <p:cNvPr id="7" name="TextBox 6"/>
+          <p:cNvSpPr txBox="1"/>
+          <p:nvPr/>
+        </p:nvSpPr>
+        <p:spPr>
+          <a:xfrm>
+            <a:off x="731520" y="365760"/>
             <a:ext cx="10698480" cy="594360"/>
           </a:xfrm>
           <a:prstGeom prst="rect">
@@ -6956,7 +8931,7 @@
           <a:lstStyle/>
           <a:p>
             <a:pPr>
-              <a:defRPr sz="2200" b="1">
+              <a:defRPr sz="2400" b="1">
                 <a:solidFill>
                   <a:srgbClr val="FFFFFF"/>
                 </a:solidFill>
@@ -6971,14 +8946,50 @@
       </p:sp>
       <p:sp>
         <p:nvSpPr>
-          <p:cNvPr id="5" name="Rounded Rectangle 4"/>
+          <p:cNvPr id="8" name="TextBox 7"/>
+          <p:cNvSpPr txBox="1"/>
+          <p:nvPr/>
+        </p:nvSpPr>
+        <p:spPr>
+          <a:xfrm>
+            <a:off x="731520" y="6510528"/>
+            <a:ext cx="10698480" cy="274320"/>
+          </a:xfrm>
+          <a:prstGeom prst="rect">
+            <a:avLst/>
+          </a:prstGeom>
+          <a:noFill/>
+        </p:spPr>
+        <p:txBody>
+          <a:bodyPr wrap="none">
+            <a:spAutoFit/>
+          </a:bodyPr>
+          <a:lstStyle/>
+          <a:p>
+            <a:pPr>
+              <a:defRPr sz="1050">
+                <a:solidFill>
+                  <a:srgbClr val="64748B"/>
+                </a:solidFill>
+                <a:latin typeface="微軟正黑體"/>
+              </a:defRPr>
+            </a:pPr>
+            <a:r>
+              <a:t>🌐 互動課程網頁：https://stjedu.github.io/www/esp32_mqtt_course.html   |   主講：簡樹桐 老師</a:t>
+            </a:r>
+          </a:p>
+        </p:txBody>
+      </p:sp>
+      <p:sp>
+        <p:nvSpPr>
+          <p:cNvPr id="9" name="Rounded Rectangle 8"/>
           <p:cNvSpPr/>
           <p:nvPr/>
         </p:nvSpPr>
         <p:spPr>
           <a:xfrm>
-            <a:off x="731520" y="1371600"/>
-            <a:ext cx="5120640" cy="4937760"/>
+            <a:off x="731520" y="1325880"/>
+            <a:ext cx="5120640" cy="4983480"/>
           </a:xfrm>
           <a:prstGeom prst="roundRect">
             <a:avLst/>
@@ -7016,14 +9027,57 @@
       </p:sp>
       <p:sp>
         <p:nvSpPr>
-          <p:cNvPr id="6" name="TextBox 5"/>
+          <p:cNvPr id="10" name="Rounded Rectangle 9"/>
+          <p:cNvSpPr/>
+          <p:nvPr/>
+        </p:nvSpPr>
+        <p:spPr>
+          <a:xfrm>
+            <a:off x="731520" y="1325880"/>
+            <a:ext cx="5120640" cy="91440"/>
+          </a:xfrm>
+          <a:prstGeom prst="roundRect">
+            <a:avLst/>
+          </a:prstGeom>
+          <a:solidFill>
+            <a:srgbClr val="0284C7"/>
+          </a:solidFill>
+          <a:ln>
+            <a:noFill/>
+          </a:ln>
+        </p:spPr>
+        <p:style>
+          <a:lnRef idx="1">
+            <a:schemeClr val="accent1"/>
+          </a:lnRef>
+          <a:fillRef idx="3">
+            <a:schemeClr val="accent1"/>
+          </a:fillRef>
+          <a:effectRef idx="2">
+            <a:schemeClr val="accent1"/>
+          </a:effectRef>
+          <a:fontRef idx="minor">
+            <a:schemeClr val="lt1"/>
+          </a:fontRef>
+        </p:style>
+        <p:txBody>
+          <a:bodyPr rtlCol="0" anchor="ctr"/>
+          <a:lstStyle/>
+          <a:p>
+            <a:pPr algn="ctr"/>
+          </a:p>
+        </p:txBody>
+      </p:sp>
+      <p:sp>
+        <p:nvSpPr>
+          <p:cNvPr id="11" name="TextBox 10"/>
           <p:cNvSpPr txBox="1"/>
           <p:nvPr/>
         </p:nvSpPr>
         <p:spPr>
           <a:xfrm>
-            <a:off x="914400" y="1508760"/>
-            <a:ext cx="4754880" cy="4663440"/>
+            <a:off x="960120" y="1508760"/>
+            <a:ext cx="4663440" cy="4663440"/>
           </a:xfrm>
           <a:prstGeom prst="rect">
             <a:avLst/>
@@ -7040,7 +9094,7 @@
               <a:spcAft>
                 <a:spcPts val="1000"/>
               </a:spcAft>
-              <a:defRPr sz="1600" b="1">
+              <a:defRPr sz="1750" b="1">
                 <a:solidFill>
                   <a:srgbClr val="0F172A"/>
                 </a:solidFill>
@@ -7053,12 +9107,15 @@
           </a:p>
           <a:p>
             <a:pPr>
+              <a:lnSpc>
+                <a:spcPct val="125000"/>
+              </a:lnSpc>
               <a:spcAft>
-                <a:spcPts val="600"/>
+                <a:spcPts val="700"/>
               </a:spcAft>
             </a:pPr>
             <a:r>
-              <a:rPr b="1" sz="1300">
+              <a:rPr b="1" sz="1350">
                 <a:solidFill>
                   <a:srgbClr val="0F172A"/>
                 </a:solidFill>
@@ -7067,7 +9124,7 @@
               <a:t>1. 視覺感知端： </a:t>
             </a:r>
             <a:r>
-              <a:rPr b="0" sz="1300">
+              <a:rPr b="0" sz="1350">
                 <a:solidFill>
                   <a:srgbClr val="64748B"/>
                 </a:solidFill>
@@ -7078,12 +9135,15 @@
           </a:p>
           <a:p>
             <a:pPr>
+              <a:lnSpc>
+                <a:spcPct val="125000"/>
+              </a:lnSpc>
               <a:spcAft>
-                <a:spcPts val="600"/>
+                <a:spcPts val="700"/>
               </a:spcAft>
             </a:pPr>
             <a:r>
-              <a:rPr b="1" sz="1300">
+              <a:rPr b="1" sz="1350">
                 <a:solidFill>
                   <a:srgbClr val="0F172A"/>
                 </a:solidFill>
@@ -7092,7 +9152,7 @@
               <a:t>2. 雲端傳輸端： </a:t>
             </a:r>
             <a:r>
-              <a:rPr b="0" sz="1300">
+              <a:rPr b="0" sz="1350">
                 <a:solidFill>
                   <a:srgbClr val="64748B"/>
                 </a:solidFill>
@@ -7103,12 +9163,15 @@
           </a:p>
           <a:p>
             <a:pPr>
+              <a:lnSpc>
+                <a:spcPct val="125000"/>
+              </a:lnSpc>
               <a:spcAft>
-                <a:spcPts val="600"/>
+                <a:spcPts val="700"/>
               </a:spcAft>
             </a:pPr>
             <a:r>
-              <a:rPr b="1" sz="1300">
+              <a:rPr b="1" sz="1350">
                 <a:solidFill>
                   <a:srgbClr val="0F172A"/>
                 </a:solidFill>
@@ -7117,7 +9180,7 @@
               <a:t>3. 邊緣執行端： </a:t>
             </a:r>
             <a:r>
-              <a:rPr b="0" sz="1300">
+              <a:rPr b="0" sz="1350">
                 <a:solidFill>
                   <a:srgbClr val="64748B"/>
                 </a:solidFill>
@@ -7128,12 +9191,15 @@
           </a:p>
           <a:p>
             <a:pPr>
+              <a:lnSpc>
+                <a:spcPct val="125000"/>
+              </a:lnSpc>
               <a:spcAft>
-                <a:spcPts val="600"/>
+                <a:spcPts val="700"/>
               </a:spcAft>
             </a:pPr>
             <a:r>
-              <a:rPr b="1" sz="1300">
+              <a:rPr b="1" sz="1350">
                 <a:solidFill>
                   <a:srgbClr val="0F172A"/>
                 </a:solidFill>
@@ -7142,7 +9208,7 @@
               <a:t>4. 手機監控端： </a:t>
             </a:r>
             <a:r>
-              <a:rPr b="0" sz="1300">
+              <a:rPr b="0" sz="1350">
                 <a:solidFill>
                   <a:srgbClr val="64748B"/>
                 </a:solidFill>
@@ -7155,14 +9221,14 @@
       </p:sp>
       <p:sp>
         <p:nvSpPr>
-          <p:cNvPr id="7" name="Rounded Rectangle 6"/>
+          <p:cNvPr id="12" name="Rounded Rectangle 11"/>
           <p:cNvSpPr/>
           <p:nvPr/>
         </p:nvSpPr>
         <p:spPr>
           <a:xfrm>
-            <a:off x="6309360" y="1371600"/>
-            <a:ext cx="5120640" cy="4937760"/>
+            <a:off x="6309360" y="1325880"/>
+            <a:ext cx="5120640" cy="4983480"/>
           </a:xfrm>
           <a:prstGeom prst="roundRect">
             <a:avLst/>
@@ -7200,14 +9266,57 @@
       </p:sp>
       <p:sp>
         <p:nvSpPr>
-          <p:cNvPr id="8" name="TextBox 7"/>
+          <p:cNvPr id="13" name="Rounded Rectangle 12"/>
+          <p:cNvSpPr/>
+          <p:nvPr/>
+        </p:nvSpPr>
+        <p:spPr>
+          <a:xfrm>
+            <a:off x="6309360" y="1325880"/>
+            <a:ext cx="5120640" cy="91440"/>
+          </a:xfrm>
+          <a:prstGeom prst="roundRect">
+            <a:avLst/>
+          </a:prstGeom>
+          <a:solidFill>
+            <a:srgbClr val="D97706"/>
+          </a:solidFill>
+          <a:ln>
+            <a:noFill/>
+          </a:ln>
+        </p:spPr>
+        <p:style>
+          <a:lnRef idx="1">
+            <a:schemeClr val="accent1"/>
+          </a:lnRef>
+          <a:fillRef idx="3">
+            <a:schemeClr val="accent1"/>
+          </a:fillRef>
+          <a:effectRef idx="2">
+            <a:schemeClr val="accent1"/>
+          </a:effectRef>
+          <a:fontRef idx="minor">
+            <a:schemeClr val="lt1"/>
+          </a:fontRef>
+        </p:style>
+        <p:txBody>
+          <a:bodyPr rtlCol="0" anchor="ctr"/>
+          <a:lstStyle/>
+          <a:p>
+            <a:pPr algn="ctr"/>
+          </a:p>
+        </p:txBody>
+      </p:sp>
+      <p:sp>
+        <p:nvSpPr>
+          <p:cNvPr id="14" name="TextBox 13"/>
           <p:cNvSpPr txBox="1"/>
           <p:nvPr/>
         </p:nvSpPr>
         <p:spPr>
           <a:xfrm>
-            <a:off x="6492240" y="1508760"/>
-            <a:ext cx="4754880" cy="4663440"/>
+            <a:off x="6537960" y="1508760"/>
+            <a:ext cx="4663440" cy="4663440"/>
           </a:xfrm>
           <a:prstGeom prst="rect">
             <a:avLst/>
@@ -7224,7 +9333,7 @@
               <a:spcAft>
                 <a:spcPts val="1000"/>
               </a:spcAft>
-              <a:defRPr sz="1600" b="1">
+              <a:defRPr sz="1750" b="1">
                 <a:solidFill>
                   <a:srgbClr val="0F172A"/>
                 </a:solidFill>
@@ -7237,12 +9346,15 @@
           </a:p>
           <a:p>
             <a:pPr>
+              <a:lnSpc>
+                <a:spcPct val="125000"/>
+              </a:lnSpc>
               <a:spcAft>
-                <a:spcPts val="600"/>
+                <a:spcPts val="700"/>
               </a:spcAft>
             </a:pPr>
             <a:r>
-              <a:rPr b="1" sz="1300">
+              <a:rPr b="1" sz="1350">
                 <a:solidFill>
                   <a:srgbClr val="0F172A"/>
                 </a:solidFill>
@@ -7251,7 +9363,7 @@
               <a:t>杜邦線與排針不要往上撩： </a:t>
             </a:r>
             <a:r>
-              <a:rPr b="0" sz="1300">
+              <a:rPr b="0" sz="1350">
                 <a:solidFill>
                   <a:srgbClr val="64748B"/>
                 </a:solidFill>
@@ -7262,12 +9374,15 @@
           </a:p>
           <a:p>
             <a:pPr>
+              <a:lnSpc>
+                <a:spcPct val="125000"/>
+              </a:lnSpc>
               <a:spcAft>
-                <a:spcPts val="600"/>
+                <a:spcPts val="700"/>
               </a:spcAft>
             </a:pPr>
             <a:r>
-              <a:rPr b="1" sz="1300">
+              <a:rPr b="1" sz="1350">
                 <a:solidFill>
                   <a:srgbClr val="0F172A"/>
                 </a:solidFill>
@@ -7276,7 +9391,7 @@
               <a:t>MQTT Broker 拼字不要錯： </a:t>
             </a:r>
             <a:r>
-              <a:rPr b="0" sz="1300">
+              <a:rPr b="0" sz="1350">
                 <a:solidFill>
                   <a:srgbClr val="64748B"/>
                 </a:solidFill>
@@ -7287,12 +9402,15 @@
           </a:p>
           <a:p>
             <a:pPr>
+              <a:lnSpc>
+                <a:spcPct val="125000"/>
+              </a:lnSpc>
               <a:spcAft>
-                <a:spcPts val="600"/>
+                <a:spcPts val="700"/>
               </a:spcAft>
             </a:pPr>
             <a:r>
-              <a:rPr b="1" sz="1300">
+              <a:rPr b="1" sz="1350">
                 <a:solidFill>
                   <a:srgbClr val="0F172A"/>
                 </a:solidFill>
@@ -7301,7 +9419,7 @@
               <a:t>Client ID 衝突導致閃退： </a:t>
             </a:r>
             <a:r>
-              <a:rPr b="0" sz="1300">
+              <a:rPr b="0" sz="1350">
                 <a:solidFill>
                   <a:srgbClr val="64748B"/>
                 </a:solidFill>
@@ -7312,12 +9430,15 @@
           </a:p>
           <a:p>
             <a:pPr>
+              <a:lnSpc>
+                <a:spcPct val="125000"/>
+              </a:lnSpc>
               <a:spcAft>
-                <a:spcPts val="600"/>
+                <a:spcPts val="700"/>
               </a:spcAft>
             </a:pPr>
             <a:r>
-              <a:rPr b="1" sz="1300">
+              <a:rPr b="1" sz="1350">
                 <a:solidFill>
                   <a:srgbClr val="0F172A"/>
                 </a:solidFill>
@@ -7326,7 +9447,7 @@
               <a:t>AI 語意除錯善用截圖： </a:t>
             </a:r>
             <a:r>
-              <a:rPr b="0" sz="1300">
+              <a:rPr b="0" sz="1350">
                 <a:solidFill>
                   <a:srgbClr val="64748B"/>
                 </a:solidFill>
@@ -7342,6 +9463,9 @@
   <p:clrMapOvr>
     <a:masterClrMapping/>
   </p:clrMapOvr>
+  <p:transition spd="med">
+    <p:fade/>
+  </p:transition>
 </p:sld>
 </file>
 
